--- a/ch03_community_level/overview_figures/overview_divnet.pptx
+++ b/ch03_community_level/overview_figures/overview_divnet.pptx
@@ -3155,8 +3155,8 @@
           <a:chExt cx="0" cy="0"/>
         </a:xfrm>
       </p:grpSpPr>
-      <mc:AlternateContent xmlns:mc="http://schemas.openxmlformats.org/markup-compatibility/2006">
-        <mc:Choice xmlns:a14="http://schemas.microsoft.com/office/drawing/2010/main" Requires="a14">
+      <mc:AlternateContent xmlns:mc="http://schemas.openxmlformats.org/markup-compatibility/2006" xmlns:a14="http://schemas.microsoft.com/office/drawing/2010/main">
+        <mc:Choice Requires="a14">
           <p:graphicFrame>
             <p:nvGraphicFramePr>
               <p:cNvPr id="128" name="Tabelle 127">
@@ -6693,7 +6693,7 @@
             </a:graphic>
           </p:graphicFrame>
         </mc:Choice>
-        <mc:Fallback>
+        <mc:Fallback xmlns="">
           <p:graphicFrame>
             <p:nvGraphicFramePr>
               <p:cNvPr id="128" name="Tabelle 127">
@@ -9801,8 +9801,8 @@
           </p:graphicFrame>
         </mc:Fallback>
       </mc:AlternateContent>
-      <mc:AlternateContent xmlns:mc="http://schemas.openxmlformats.org/markup-compatibility/2006">
-        <mc:Choice xmlns:a14="http://schemas.microsoft.com/office/drawing/2010/main" Requires="a14">
+      <mc:AlternateContent xmlns:mc="http://schemas.openxmlformats.org/markup-compatibility/2006" xmlns:a14="http://schemas.microsoft.com/office/drawing/2010/main">
+        <mc:Choice Requires="a14">
           <p:graphicFrame>
             <p:nvGraphicFramePr>
               <p:cNvPr id="129" name="Tabelle 128">
@@ -12905,7 +12905,7 @@
             </a:graphic>
           </p:graphicFrame>
         </mc:Choice>
-        <mc:Fallback>
+        <mc:Fallback xmlns="">
           <p:graphicFrame>
             <p:nvGraphicFramePr>
               <p:cNvPr id="129" name="Tabelle 128">
@@ -15638,7 +15638,7 @@
         </p:nvSpPr>
         <p:spPr>
           <a:xfrm rot="16200000">
-            <a:off x="-343787" y="4625375"/>
+            <a:off x="-343787" y="4818415"/>
             <a:ext cx="1122167" cy="430887"/>
           </a:xfrm>
           <a:prstGeom prst="rect">
@@ -15735,7 +15735,7 @@
         <p:spPr>
           <a:xfrm>
             <a:off x="382327" y="3817248"/>
-            <a:ext cx="118872" cy="2051027"/>
+            <a:ext cx="118872" cy="2441910"/>
           </a:xfrm>
           <a:prstGeom prst="leftBrace">
             <a:avLst>
@@ -15882,8 +15882,8 @@
           </a:p>
         </p:txBody>
       </p:sp>
-      <mc:AlternateContent xmlns:mc="http://schemas.openxmlformats.org/markup-compatibility/2006">
-        <mc:Choice xmlns:a14="http://schemas.microsoft.com/office/drawing/2010/main" Requires="a14">
+      <mc:AlternateContent xmlns:mc="http://schemas.openxmlformats.org/markup-compatibility/2006" xmlns:a14="http://schemas.microsoft.com/office/drawing/2010/main">
+        <mc:Choice Requires="a14">
           <p:graphicFrame>
             <p:nvGraphicFramePr>
               <p:cNvPr id="137" name="Tabelle 136">
@@ -15899,7 +15899,7 @@
               <p:nvPr>
                 <p:extLst>
                   <p:ext uri="{D42A27DB-BD31-4B8C-83A1-F6EECF244321}">
-                    <p14:modId xmlns:p14="http://schemas.microsoft.com/office/powerpoint/2010/main" val="353290440"/>
+                    <p14:modId xmlns:p14="http://schemas.microsoft.com/office/powerpoint/2010/main" val="2074602306"/>
                   </p:ext>
                 </p:extLst>
               </p:nvPr>
@@ -16262,7 +16262,7 @@
                           <a:pPr algn="ctr"/>
                           <a:r>
                             <a:rPr lang="en-US" sz="2000" dirty="0"/>
-                            <a:t>0.3</a:t>
+                            <a:t>2</a:t>
                           </a:r>
                         </a:p>
                       </a:txBody>
@@ -16316,7 +16316,7 @@
                           <a:pPr algn="ctr"/>
                           <a:r>
                             <a:rPr lang="en-US" sz="2000" dirty="0"/>
-                            <a:t>5.1</a:t>
+                            <a:t>1</a:t>
                           </a:r>
                         </a:p>
                       </a:txBody>
@@ -16684,7 +16684,7 @@
                           <a:pPr algn="ctr"/>
                           <a:r>
                             <a:rPr lang="en-US" sz="2000" dirty="0"/>
-                            <a:t>1.2</a:t>
+                            <a:t>1</a:t>
                           </a:r>
                         </a:p>
                       </a:txBody>
@@ -16738,7 +16738,7 @@
                           <a:pPr algn="ctr"/>
                           <a:r>
                             <a:rPr lang="en-US" sz="2000" dirty="0"/>
-                            <a:t>2.2</a:t>
+                            <a:t>3</a:t>
                           </a:r>
                         </a:p>
                       </a:txBody>
@@ -16853,7 +16853,7 @@
                           <a:pPr algn="ctr"/>
                           <a:r>
                             <a:rPr lang="en-US" sz="2000" dirty="0"/>
-                            <a:t>0.8</a:t>
+                            <a:t>1</a:t>
                           </a:r>
                         </a:p>
                       </a:txBody>
@@ -16907,7 +16907,7 @@
                           <a:pPr algn="ctr"/>
                           <a:r>
                             <a:rPr lang="en-US" sz="2000" dirty="0"/>
-                            <a:t>3.0</a:t>
+                            <a:t>2</a:t>
                           </a:r>
                         </a:p>
                       </a:txBody>
@@ -17275,7 +17275,7 @@
                           <a:pPr algn="ctr"/>
                           <a:r>
                             <a:rPr lang="en-US" sz="2000" dirty="0"/>
-                            <a:t>0.5</a:t>
+                            <a:t>2</a:t>
                           </a:r>
                         </a:p>
                       </a:txBody>
@@ -17329,7 +17329,7 @@
                           <a:pPr algn="ctr"/>
                           <a:r>
                             <a:rPr lang="en-US" sz="2000" dirty="0"/>
-                            <a:t>1.5</a:t>
+                            <a:t>3</a:t>
                           </a:r>
                         </a:p>
                       </a:txBody>
@@ -17386,7 +17386,7 @@
             </a:graphic>
           </p:graphicFrame>
         </mc:Choice>
-        <mc:Fallback>
+        <mc:Fallback xmlns="">
           <p:graphicFrame>
             <p:nvGraphicFramePr>
               <p:cNvPr id="137" name="Tabelle 136">
@@ -17402,7 +17402,7 @@
               <p:nvPr>
                 <p:extLst>
                   <p:ext uri="{D42A27DB-BD31-4B8C-83A1-F6EECF244321}">
-                    <p14:modId xmlns:p14="http://schemas.microsoft.com/office/powerpoint/2010/main" val="353290440"/>
+                    <p14:modId xmlns:p14="http://schemas.microsoft.com/office/powerpoint/2010/main" val="2074602306"/>
                   </p:ext>
                 </p:extLst>
               </p:nvPr>
@@ -17675,7 +17675,7 @@
                           <a:pPr algn="ctr"/>
                           <a:r>
                             <a:rPr lang="en-US" sz="2000" dirty="0"/>
-                            <a:t>0.3</a:t>
+                            <a:t>2</a:t>
                           </a:r>
                         </a:p>
                       </a:txBody>
@@ -17729,7 +17729,7 @@
                           <a:pPr algn="ctr"/>
                           <a:r>
                             <a:rPr lang="en-US" sz="2000" dirty="0"/>
-                            <a:t>5.1</a:t>
+                            <a:t>1</a:t>
                           </a:r>
                         </a:p>
                       </a:txBody>
@@ -18010,7 +18010,7 @@
                           <a:pPr algn="ctr"/>
                           <a:r>
                             <a:rPr lang="en-US" sz="2000" dirty="0"/>
-                            <a:t>1.2</a:t>
+                            <a:t>1</a:t>
                           </a:r>
                         </a:p>
                       </a:txBody>
@@ -18064,7 +18064,7 @@
                           <a:pPr algn="ctr"/>
                           <a:r>
                             <a:rPr lang="en-US" sz="2000" dirty="0"/>
-                            <a:t>2.2</a:t>
+                            <a:t>3</a:t>
                           </a:r>
                         </a:p>
                       </a:txBody>
@@ -18179,7 +18179,7 @@
                           <a:pPr algn="ctr"/>
                           <a:r>
                             <a:rPr lang="en-US" sz="2000" dirty="0"/>
-                            <a:t>0.8</a:t>
+                            <a:t>1</a:t>
                           </a:r>
                         </a:p>
                       </a:txBody>
@@ -18233,7 +18233,7 @@
                           <a:pPr algn="ctr"/>
                           <a:r>
                             <a:rPr lang="en-US" sz="2000" dirty="0"/>
-                            <a:t>3.0</a:t>
+                            <a:t>2</a:t>
                           </a:r>
                         </a:p>
                       </a:txBody>
@@ -18514,7 +18514,7 @@
                           <a:pPr algn="ctr"/>
                           <a:r>
                             <a:rPr lang="en-US" sz="2000" dirty="0"/>
-                            <a:t>0.5</a:t>
+                            <a:t>2</a:t>
                           </a:r>
                         </a:p>
                       </a:txBody>
@@ -18568,7 +18568,7 @@
                           <a:pPr algn="ctr"/>
                           <a:r>
                             <a:rPr lang="en-US" sz="2000" dirty="0"/>
-                            <a:t>1.5</a:t>
+                            <a:t>3</a:t>
                           </a:r>
                         </a:p>
                       </a:txBody>
@@ -18626,8 +18626,8 @@
           </p:graphicFrame>
         </mc:Fallback>
       </mc:AlternateContent>
-      <mc:AlternateContent xmlns:mc="http://schemas.openxmlformats.org/markup-compatibility/2006">
-        <mc:Choice xmlns:a14="http://schemas.microsoft.com/office/drawing/2010/main" Requires="a14">
+      <mc:AlternateContent xmlns:mc="http://schemas.openxmlformats.org/markup-compatibility/2006" xmlns:a14="http://schemas.microsoft.com/office/drawing/2010/main">
+        <mc:Choice Requires="a14">
           <p:graphicFrame>
             <p:nvGraphicFramePr>
               <p:cNvPr id="139" name="Tabelle 138">
@@ -18643,7 +18643,7 @@
               <p:nvPr>
                 <p:extLst>
                   <p:ext uri="{D42A27DB-BD31-4B8C-83A1-F6EECF244321}">
-                    <p14:modId xmlns:p14="http://schemas.microsoft.com/office/powerpoint/2010/main" val="2971735660"/>
+                    <p14:modId xmlns:p14="http://schemas.microsoft.com/office/powerpoint/2010/main" val="3412137609"/>
                   </p:ext>
                 </p:extLst>
               </p:nvPr>
@@ -18744,7 +18744,7 @@
                           <a:pPr algn="ctr"/>
                           <a:r>
                             <a:rPr lang="en-US" sz="2000" dirty="0"/>
-                            <a:t>0.6</a:t>
+                            <a:t>1</a:t>
                           </a:r>
                         </a:p>
                       </a:txBody>
@@ -18798,7 +18798,7 @@
                           <a:pPr algn="ctr"/>
                           <a:r>
                             <a:rPr lang="en-US" sz="2000" dirty="0"/>
-                            <a:t>2.9</a:t>
+                            <a:t>2</a:t>
                           </a:r>
                         </a:p>
                       </a:txBody>
@@ -18913,7 +18913,7 @@
                           <a:pPr algn="ctr"/>
                           <a:r>
                             <a:rPr lang="en-US" sz="2000" dirty="0"/>
-                            <a:t>1.1</a:t>
+                            <a:t>2</a:t>
                           </a:r>
                         </a:p>
                       </a:txBody>
@@ -18967,7 +18967,7 @@
                           <a:pPr algn="ctr"/>
                           <a:r>
                             <a:rPr lang="en-US" sz="2000" dirty="0"/>
-                            <a:t>1.3</a:t>
+                            <a:t>3</a:t>
                           </a:r>
                         </a:p>
                       </a:txBody>
@@ -19335,7 +19335,7 @@
                           <a:pPr algn="ctr"/>
                           <a:r>
                             <a:rPr lang="en-US" sz="2000" dirty="0"/>
-                            <a:t>0.2</a:t>
+                            <a:t>1</a:t>
                           </a:r>
                         </a:p>
                       </a:txBody>
@@ -19389,7 +19389,7 @@
                           <a:pPr algn="ctr"/>
                           <a:r>
                             <a:rPr lang="en-US" sz="2000" dirty="0"/>
-                            <a:t>0.8</a:t>
+                            <a:t>1</a:t>
                           </a:r>
                         </a:p>
                       </a:txBody>
@@ -19757,7 +19757,7 @@
                           <a:pPr algn="ctr"/>
                           <a:r>
                             <a:rPr lang="en-US" sz="2000" dirty="0"/>
-                            <a:t>1.5</a:t>
+                            <a:t>2</a:t>
                           </a:r>
                         </a:p>
                       </a:txBody>
@@ -19811,7 +19811,7 @@
                           <a:pPr algn="ctr"/>
                           <a:r>
                             <a:rPr lang="en-US" sz="2000" dirty="0"/>
-                            <a:t>2.7</a:t>
+                            <a:t>1</a:t>
                           </a:r>
                         </a:p>
                       </a:txBody>
@@ -19868,7 +19868,7 @@
             </a:graphic>
           </p:graphicFrame>
         </mc:Choice>
-        <mc:Fallback>
+        <mc:Fallback xmlns="">
           <p:graphicFrame>
             <p:nvGraphicFramePr>
               <p:cNvPr id="139" name="Tabelle 138">
@@ -19884,7 +19884,7 @@
               <p:nvPr>
                 <p:extLst>
                   <p:ext uri="{D42A27DB-BD31-4B8C-83A1-F6EECF244321}">
-                    <p14:modId xmlns:p14="http://schemas.microsoft.com/office/powerpoint/2010/main" val="2971735660"/>
+                    <p14:modId xmlns:p14="http://schemas.microsoft.com/office/powerpoint/2010/main" val="3412137609"/>
                   </p:ext>
                 </p:extLst>
               </p:nvPr>
@@ -19985,7 +19985,7 @@
                           <a:pPr algn="ctr"/>
                           <a:r>
                             <a:rPr lang="en-US" sz="2000" dirty="0"/>
-                            <a:t>0.6</a:t>
+                            <a:t>1</a:t>
                           </a:r>
                         </a:p>
                       </a:txBody>
@@ -20039,7 +20039,7 @@
                           <a:pPr algn="ctr"/>
                           <a:r>
                             <a:rPr lang="en-US" sz="2000" dirty="0"/>
-                            <a:t>2.9</a:t>
+                            <a:t>2</a:t>
                           </a:r>
                         </a:p>
                       </a:txBody>
@@ -20154,7 +20154,7 @@
                           <a:pPr algn="ctr"/>
                           <a:r>
                             <a:rPr lang="en-US" sz="2000" dirty="0"/>
-                            <a:t>1.1</a:t>
+                            <a:t>2</a:t>
                           </a:r>
                         </a:p>
                       </a:txBody>
@@ -20208,7 +20208,7 @@
                           <a:pPr algn="ctr"/>
                           <a:r>
                             <a:rPr lang="en-US" sz="2000" dirty="0"/>
-                            <a:t>1.3</a:t>
+                            <a:t>3</a:t>
                           </a:r>
                         </a:p>
                       </a:txBody>
@@ -20489,7 +20489,7 @@
                           <a:pPr algn="ctr"/>
                           <a:r>
                             <a:rPr lang="en-US" sz="2000" dirty="0"/>
-                            <a:t>0.2</a:t>
+                            <a:t>1</a:t>
                           </a:r>
                         </a:p>
                       </a:txBody>
@@ -20543,7 +20543,7 @@
                           <a:pPr algn="ctr"/>
                           <a:r>
                             <a:rPr lang="en-US" sz="2000" dirty="0"/>
-                            <a:t>0.8</a:t>
+                            <a:t>1</a:t>
                           </a:r>
                         </a:p>
                       </a:txBody>
@@ -20824,7 +20824,7 @@
                           <a:pPr algn="ctr"/>
                           <a:r>
                             <a:rPr lang="en-US" sz="2000" dirty="0"/>
-                            <a:t>1.5</a:t>
+                            <a:t>2</a:t>
                           </a:r>
                         </a:p>
                       </a:txBody>
@@ -20878,7 +20878,7 @@
                           <a:pPr algn="ctr"/>
                           <a:r>
                             <a:rPr lang="en-US" sz="2000" dirty="0"/>
-                            <a:t>2.7</a:t>
+                            <a:t>1</a:t>
                           </a:r>
                         </a:p>
                       </a:txBody>
@@ -21170,12 +21170,409 @@
           </a:fontRef>
         </p:style>
       </p:cxnSp>
+      <p:cxnSp>
+        <p:nvCxnSpPr>
+          <p:cNvPr id="156" name="Gerader Verbinder 155">
+            <a:extLst>
+              <a:ext uri="{FF2B5EF4-FFF2-40B4-BE49-F238E27FC236}">
+                <a16:creationId xmlns:a16="http://schemas.microsoft.com/office/drawing/2014/main" id="{22EC6627-53A2-2B85-64D5-E7630E86541E}"/>
+              </a:ext>
+            </a:extLst>
+          </p:cNvPr>
+          <p:cNvCxnSpPr/>
+          <p:nvPr/>
+        </p:nvCxnSpPr>
+        <p:spPr>
+          <a:xfrm>
+            <a:off x="10817508" y="1060948"/>
+            <a:ext cx="0" cy="2393499"/>
+          </a:xfrm>
+          <a:prstGeom prst="line">
+            <a:avLst/>
+          </a:prstGeom>
+          <a:ln w="28575">
+            <a:solidFill>
+              <a:schemeClr val="tx1">
+                <a:lumMod val="50000"/>
+                <a:lumOff val="50000"/>
+              </a:schemeClr>
+            </a:solidFill>
+            <a:prstDash val="dash"/>
+          </a:ln>
+        </p:spPr>
+        <p:style>
+          <a:lnRef idx="1">
+            <a:schemeClr val="accent1"/>
+          </a:lnRef>
+          <a:fillRef idx="0">
+            <a:schemeClr val="accent1"/>
+          </a:fillRef>
+          <a:effectRef idx="0">
+            <a:schemeClr val="accent1"/>
+          </a:effectRef>
+          <a:fontRef idx="minor">
+            <a:schemeClr val="tx1"/>
+          </a:fontRef>
+        </p:style>
+      </p:cxnSp>
+      <p:cxnSp>
+        <p:nvCxnSpPr>
+          <p:cNvPr id="157" name="Gerader Verbinder 156">
+            <a:extLst>
+              <a:ext uri="{FF2B5EF4-FFF2-40B4-BE49-F238E27FC236}">
+                <a16:creationId xmlns:a16="http://schemas.microsoft.com/office/drawing/2014/main" id="{29ED47CA-589B-34E0-B6AA-D3BB2A905D4F}"/>
+              </a:ext>
+            </a:extLst>
+          </p:cNvPr>
+          <p:cNvCxnSpPr>
+            <a:cxnSpLocks/>
+          </p:cNvCxnSpPr>
+          <p:nvPr/>
+        </p:nvCxnSpPr>
+        <p:spPr>
+          <a:xfrm>
+            <a:off x="10174780" y="3377269"/>
+            <a:ext cx="1916320" cy="0"/>
+          </a:xfrm>
+          <a:prstGeom prst="line">
+            <a:avLst/>
+          </a:prstGeom>
+          <a:ln w="25400">
+            <a:solidFill>
+              <a:schemeClr val="tx1"/>
+            </a:solidFill>
+          </a:ln>
+        </p:spPr>
+        <p:style>
+          <a:lnRef idx="1">
+            <a:schemeClr val="accent1"/>
+          </a:lnRef>
+          <a:fillRef idx="0">
+            <a:schemeClr val="accent1"/>
+          </a:fillRef>
+          <a:effectRef idx="0">
+            <a:schemeClr val="accent1"/>
+          </a:effectRef>
+          <a:fontRef idx="minor">
+            <a:schemeClr val="tx1"/>
+          </a:fontRef>
+        </p:style>
+      </p:cxnSp>
+      <p:cxnSp>
+        <p:nvCxnSpPr>
+          <p:cNvPr id="158" name="Gerader Verbinder 157">
+            <a:extLst>
+              <a:ext uri="{FF2B5EF4-FFF2-40B4-BE49-F238E27FC236}">
+                <a16:creationId xmlns:a16="http://schemas.microsoft.com/office/drawing/2014/main" id="{8D322C75-408A-F286-D464-1C681E327F5C}"/>
+              </a:ext>
+            </a:extLst>
+          </p:cNvPr>
+          <p:cNvCxnSpPr>
+            <a:cxnSpLocks/>
+          </p:cNvCxnSpPr>
+          <p:nvPr/>
+        </p:nvCxnSpPr>
+        <p:spPr>
+          <a:xfrm>
+            <a:off x="10267629" y="3377269"/>
+            <a:ext cx="0" cy="100739"/>
+          </a:xfrm>
+          <a:prstGeom prst="line">
+            <a:avLst/>
+          </a:prstGeom>
+          <a:ln w="25400">
+            <a:solidFill>
+              <a:schemeClr val="tx1"/>
+            </a:solidFill>
+          </a:ln>
+        </p:spPr>
+        <p:style>
+          <a:lnRef idx="1">
+            <a:schemeClr val="accent1"/>
+          </a:lnRef>
+          <a:fillRef idx="0">
+            <a:schemeClr val="accent1"/>
+          </a:fillRef>
+          <a:effectRef idx="0">
+            <a:schemeClr val="accent1"/>
+          </a:effectRef>
+          <a:fontRef idx="minor">
+            <a:schemeClr val="tx1"/>
+          </a:fontRef>
+        </p:style>
+      </p:cxnSp>
+      <p:cxnSp>
+        <p:nvCxnSpPr>
+          <p:cNvPr id="159" name="Gerader Verbinder 158">
+            <a:extLst>
+              <a:ext uri="{FF2B5EF4-FFF2-40B4-BE49-F238E27FC236}">
+                <a16:creationId xmlns:a16="http://schemas.microsoft.com/office/drawing/2014/main" id="{AED6C9B5-E7FD-4BC0-B2B1-86DA6F5BFB6C}"/>
+              </a:ext>
+            </a:extLst>
+          </p:cNvPr>
+          <p:cNvCxnSpPr/>
+          <p:nvPr/>
+        </p:nvCxnSpPr>
+        <p:spPr>
+          <a:xfrm>
+            <a:off x="10817508" y="3377269"/>
+            <a:ext cx="0" cy="100739"/>
+          </a:xfrm>
+          <a:prstGeom prst="line">
+            <a:avLst/>
+          </a:prstGeom>
+          <a:ln w="25400">
+            <a:solidFill>
+              <a:schemeClr val="tx1"/>
+            </a:solidFill>
+          </a:ln>
+        </p:spPr>
+        <p:style>
+          <a:lnRef idx="1">
+            <a:schemeClr val="accent1"/>
+          </a:lnRef>
+          <a:fillRef idx="0">
+            <a:schemeClr val="accent1"/>
+          </a:fillRef>
+          <a:effectRef idx="0">
+            <a:schemeClr val="accent1"/>
+          </a:effectRef>
+          <a:fontRef idx="minor">
+            <a:schemeClr val="tx1"/>
+          </a:fontRef>
+        </p:style>
+      </p:cxnSp>
+      <p:cxnSp>
+        <p:nvCxnSpPr>
+          <p:cNvPr id="160" name="Gerader Verbinder 159">
+            <a:extLst>
+              <a:ext uri="{FF2B5EF4-FFF2-40B4-BE49-F238E27FC236}">
+                <a16:creationId xmlns:a16="http://schemas.microsoft.com/office/drawing/2014/main" id="{C5621B52-7E89-E2E4-DD36-DF0EA7F4DE4B}"/>
+              </a:ext>
+            </a:extLst>
+          </p:cNvPr>
+          <p:cNvCxnSpPr/>
+          <p:nvPr/>
+        </p:nvCxnSpPr>
+        <p:spPr>
+          <a:xfrm>
+            <a:off x="11377578" y="3377269"/>
+            <a:ext cx="0" cy="100739"/>
+          </a:xfrm>
+          <a:prstGeom prst="line">
+            <a:avLst/>
+          </a:prstGeom>
+          <a:ln w="25400">
+            <a:solidFill>
+              <a:schemeClr val="tx1"/>
+            </a:solidFill>
+          </a:ln>
+        </p:spPr>
+        <p:style>
+          <a:lnRef idx="1">
+            <a:schemeClr val="accent1"/>
+          </a:lnRef>
+          <a:fillRef idx="0">
+            <a:schemeClr val="accent1"/>
+          </a:fillRef>
+          <a:effectRef idx="0">
+            <a:schemeClr val="accent1"/>
+          </a:effectRef>
+          <a:fontRef idx="minor">
+            <a:schemeClr val="tx1"/>
+          </a:fontRef>
+        </p:style>
+      </p:cxnSp>
+      <p:cxnSp>
+        <p:nvCxnSpPr>
+          <p:cNvPr id="161" name="Gerader Verbinder 160">
+            <a:extLst>
+              <a:ext uri="{FF2B5EF4-FFF2-40B4-BE49-F238E27FC236}">
+                <a16:creationId xmlns:a16="http://schemas.microsoft.com/office/drawing/2014/main" id="{428592DF-C37A-A89C-D33C-BA438B550FEE}"/>
+              </a:ext>
+            </a:extLst>
+          </p:cNvPr>
+          <p:cNvCxnSpPr/>
+          <p:nvPr/>
+        </p:nvCxnSpPr>
+        <p:spPr>
+          <a:xfrm>
+            <a:off x="11937648" y="3377269"/>
+            <a:ext cx="0" cy="100739"/>
+          </a:xfrm>
+          <a:prstGeom prst="line">
+            <a:avLst/>
+          </a:prstGeom>
+          <a:ln w="25400">
+            <a:solidFill>
+              <a:schemeClr val="tx1"/>
+            </a:solidFill>
+          </a:ln>
+        </p:spPr>
+        <p:style>
+          <a:lnRef idx="1">
+            <a:schemeClr val="accent1"/>
+          </a:lnRef>
+          <a:fillRef idx="0">
+            <a:schemeClr val="accent1"/>
+          </a:fillRef>
+          <a:effectRef idx="0">
+            <a:schemeClr val="accent1"/>
+          </a:effectRef>
+          <a:fontRef idx="minor">
+            <a:schemeClr val="tx1"/>
+          </a:fontRef>
+        </p:style>
+      </p:cxnSp>
+      <p:sp>
+        <p:nvSpPr>
+          <p:cNvPr id="162" name="Textfeld 161">
+            <a:extLst>
+              <a:ext uri="{FF2B5EF4-FFF2-40B4-BE49-F238E27FC236}">
+                <a16:creationId xmlns:a16="http://schemas.microsoft.com/office/drawing/2014/main" id="{45F96C64-9178-77DA-EFE6-73C60CA123CC}"/>
+              </a:ext>
+            </a:extLst>
+          </p:cNvPr>
+          <p:cNvSpPr txBox="1"/>
+          <p:nvPr/>
+        </p:nvSpPr>
+        <p:spPr>
+          <a:xfrm>
+            <a:off x="10047163" y="3456454"/>
+            <a:ext cx="413896" cy="430887"/>
+          </a:xfrm>
+          <a:prstGeom prst="rect">
+            <a:avLst/>
+          </a:prstGeom>
+          <a:noFill/>
+        </p:spPr>
+        <p:txBody>
+          <a:bodyPr wrap="none" rtlCol="0">
+            <a:spAutoFit/>
+          </a:bodyPr>
+          <a:lstStyle/>
+          <a:p>
+            <a:r>
+              <a:rPr lang="en-US" sz="2200" dirty="0"/>
+              <a:t>-1</a:t>
+            </a:r>
+          </a:p>
+        </p:txBody>
+      </p:sp>
+      <p:sp>
+        <p:nvSpPr>
+          <p:cNvPr id="167" name="Textfeld 166">
+            <a:extLst>
+              <a:ext uri="{FF2B5EF4-FFF2-40B4-BE49-F238E27FC236}">
+                <a16:creationId xmlns:a16="http://schemas.microsoft.com/office/drawing/2014/main" id="{7D0EB7DB-2FBF-65EC-5CCE-4D8CC922B66D}"/>
+              </a:ext>
+            </a:extLst>
+          </p:cNvPr>
+          <p:cNvSpPr txBox="1"/>
+          <p:nvPr/>
+        </p:nvSpPr>
+        <p:spPr>
+          <a:xfrm>
+            <a:off x="10659695" y="3448834"/>
+            <a:ext cx="327334" cy="430887"/>
+          </a:xfrm>
+          <a:prstGeom prst="rect">
+            <a:avLst/>
+          </a:prstGeom>
+          <a:noFill/>
+          <a:ln>
+            <a:noFill/>
+          </a:ln>
+        </p:spPr>
+        <p:txBody>
+          <a:bodyPr wrap="none" rtlCol="0">
+            <a:spAutoFit/>
+          </a:bodyPr>
+          <a:lstStyle/>
+          <a:p>
+            <a:r>
+              <a:rPr lang="en-US" sz="2200" dirty="0"/>
+              <a:t>0</a:t>
+            </a:r>
+          </a:p>
+        </p:txBody>
+      </p:sp>
+      <p:sp>
+        <p:nvSpPr>
+          <p:cNvPr id="168" name="Textfeld 167">
+            <a:extLst>
+              <a:ext uri="{FF2B5EF4-FFF2-40B4-BE49-F238E27FC236}">
+                <a16:creationId xmlns:a16="http://schemas.microsoft.com/office/drawing/2014/main" id="{5F2D7893-7EE1-E6BB-27BF-982448787F5E}"/>
+              </a:ext>
+            </a:extLst>
+          </p:cNvPr>
+          <p:cNvSpPr txBox="1"/>
+          <p:nvPr/>
+        </p:nvSpPr>
+        <p:spPr>
+          <a:xfrm>
+            <a:off x="11214395" y="3437550"/>
+            <a:ext cx="327334" cy="430887"/>
+          </a:xfrm>
+          <a:prstGeom prst="rect">
+            <a:avLst/>
+          </a:prstGeom>
+          <a:noFill/>
+        </p:spPr>
+        <p:txBody>
+          <a:bodyPr wrap="none" rtlCol="0">
+            <a:spAutoFit/>
+          </a:bodyPr>
+          <a:lstStyle/>
+          <a:p>
+            <a:r>
+              <a:rPr lang="en-US" sz="2200" dirty="0"/>
+              <a:t>1</a:t>
+            </a:r>
+          </a:p>
+        </p:txBody>
+      </p:sp>
+      <p:sp>
+        <p:nvSpPr>
+          <p:cNvPr id="189" name="Textfeld 188">
+            <a:extLst>
+              <a:ext uri="{FF2B5EF4-FFF2-40B4-BE49-F238E27FC236}">
+                <a16:creationId xmlns:a16="http://schemas.microsoft.com/office/drawing/2014/main" id="{99B60D59-9D3A-642C-BEEE-39C0D5EA4BCA}"/>
+              </a:ext>
+            </a:extLst>
+          </p:cNvPr>
+          <p:cNvSpPr txBox="1"/>
+          <p:nvPr/>
+        </p:nvSpPr>
+        <p:spPr>
+          <a:xfrm>
+            <a:off x="11779254" y="3437550"/>
+            <a:ext cx="327334" cy="430887"/>
+          </a:xfrm>
+          <a:prstGeom prst="rect">
+            <a:avLst/>
+          </a:prstGeom>
+          <a:noFill/>
+        </p:spPr>
+        <p:txBody>
+          <a:bodyPr wrap="none" rtlCol="0">
+            <a:spAutoFit/>
+          </a:bodyPr>
+          <a:lstStyle/>
+          <a:p>
+            <a:r>
+              <a:rPr lang="en-US" sz="2200" dirty="0"/>
+              <a:t>2</a:t>
+            </a:r>
+          </a:p>
+        </p:txBody>
+      </p:sp>
       <p:grpSp>
         <p:nvGrpSpPr>
-          <p:cNvPr id="155" name="Gruppieren 154">
+          <p:cNvPr id="190" name="Gruppieren 189">
             <a:extLst>
               <a:ext uri="{FF2B5EF4-FFF2-40B4-BE49-F238E27FC236}">
-                <a16:creationId xmlns:a16="http://schemas.microsoft.com/office/drawing/2014/main" id="{09CECAA8-0ADD-B699-12A3-3FC0DBE565ED}"/>
+                <a16:creationId xmlns:a16="http://schemas.microsoft.com/office/drawing/2014/main" id="{58BCB985-40E3-D582-A8F1-659338EF34F3}"/>
               </a:ext>
             </a:extLst>
           </p:cNvPr>
@@ -21184,412 +21581,18 @@
         </p:nvGrpSpPr>
         <p:grpSpPr>
           <a:xfrm>
-            <a:off x="9798356" y="1060948"/>
-            <a:ext cx="2674217" cy="3120843"/>
-            <a:chOff x="9696756" y="1060948"/>
-            <a:chExt cx="2674217" cy="3120843"/>
+            <a:off x="10617249" y="2260994"/>
+            <a:ext cx="1457860" cy="144000"/>
+            <a:chOff x="10678894" y="3153436"/>
+            <a:chExt cx="1457860" cy="144000"/>
           </a:xfrm>
         </p:grpSpPr>
-        <p:cxnSp>
-          <p:nvCxnSpPr>
-            <p:cNvPr id="156" name="Gerader Verbinder 155">
+        <p:grpSp>
+          <p:nvGrpSpPr>
+            <p:cNvPr id="212" name="Gruppieren 211">
               <a:extLst>
                 <a:ext uri="{FF2B5EF4-FFF2-40B4-BE49-F238E27FC236}">
-                  <a16:creationId xmlns:a16="http://schemas.microsoft.com/office/drawing/2014/main" id="{22EC6627-53A2-2B85-64D5-E7630E86541E}"/>
-                </a:ext>
-              </a:extLst>
-            </p:cNvPr>
-            <p:cNvCxnSpPr/>
-            <p:nvPr/>
-          </p:nvCxnSpPr>
-          <p:spPr>
-            <a:xfrm>
-              <a:off x="10715908" y="1060948"/>
-              <a:ext cx="0" cy="2393499"/>
-            </a:xfrm>
-            <a:prstGeom prst="line">
-              <a:avLst/>
-            </a:prstGeom>
-            <a:ln w="28575">
-              <a:solidFill>
-                <a:schemeClr val="tx1">
-                  <a:lumMod val="50000"/>
-                  <a:lumOff val="50000"/>
-                </a:schemeClr>
-              </a:solidFill>
-              <a:prstDash val="dash"/>
-            </a:ln>
-          </p:spPr>
-          <p:style>
-            <a:lnRef idx="1">
-              <a:schemeClr val="accent1"/>
-            </a:lnRef>
-            <a:fillRef idx="0">
-              <a:schemeClr val="accent1"/>
-            </a:fillRef>
-            <a:effectRef idx="0">
-              <a:schemeClr val="accent1"/>
-            </a:effectRef>
-            <a:fontRef idx="minor">
-              <a:schemeClr val="tx1"/>
-            </a:fontRef>
-          </p:style>
-        </p:cxnSp>
-        <p:cxnSp>
-          <p:nvCxnSpPr>
-            <p:cNvPr id="157" name="Gerader Verbinder 156">
-              <a:extLst>
-                <a:ext uri="{FF2B5EF4-FFF2-40B4-BE49-F238E27FC236}">
-                  <a16:creationId xmlns:a16="http://schemas.microsoft.com/office/drawing/2014/main" id="{29ED47CA-589B-34E0-B6AA-D3BB2A905D4F}"/>
-                </a:ext>
-              </a:extLst>
-            </p:cNvPr>
-            <p:cNvCxnSpPr>
-              <a:cxnSpLocks/>
-            </p:cNvCxnSpPr>
-            <p:nvPr/>
-          </p:nvCxnSpPr>
-          <p:spPr>
-            <a:xfrm>
-              <a:off x="10073180" y="3377269"/>
-              <a:ext cx="1916320" cy="0"/>
-            </a:xfrm>
-            <a:prstGeom prst="line">
-              <a:avLst/>
-            </a:prstGeom>
-            <a:ln w="25400">
-              <a:solidFill>
-                <a:schemeClr val="tx1"/>
-              </a:solidFill>
-            </a:ln>
-          </p:spPr>
-          <p:style>
-            <a:lnRef idx="1">
-              <a:schemeClr val="accent1"/>
-            </a:lnRef>
-            <a:fillRef idx="0">
-              <a:schemeClr val="accent1"/>
-            </a:fillRef>
-            <a:effectRef idx="0">
-              <a:schemeClr val="accent1"/>
-            </a:effectRef>
-            <a:fontRef idx="minor">
-              <a:schemeClr val="tx1"/>
-            </a:fontRef>
-          </p:style>
-        </p:cxnSp>
-        <p:cxnSp>
-          <p:nvCxnSpPr>
-            <p:cNvPr id="158" name="Gerader Verbinder 157">
-              <a:extLst>
-                <a:ext uri="{FF2B5EF4-FFF2-40B4-BE49-F238E27FC236}">
-                  <a16:creationId xmlns:a16="http://schemas.microsoft.com/office/drawing/2014/main" id="{8D322C75-408A-F286-D464-1C681E327F5C}"/>
-                </a:ext>
-              </a:extLst>
-            </p:cNvPr>
-            <p:cNvCxnSpPr>
-              <a:cxnSpLocks/>
-            </p:cNvCxnSpPr>
-            <p:nvPr/>
-          </p:nvCxnSpPr>
-          <p:spPr>
-            <a:xfrm>
-              <a:off x="10166029" y="3377269"/>
-              <a:ext cx="0" cy="100739"/>
-            </a:xfrm>
-            <a:prstGeom prst="line">
-              <a:avLst/>
-            </a:prstGeom>
-            <a:ln w="25400">
-              <a:solidFill>
-                <a:schemeClr val="tx1"/>
-              </a:solidFill>
-            </a:ln>
-          </p:spPr>
-          <p:style>
-            <a:lnRef idx="1">
-              <a:schemeClr val="accent1"/>
-            </a:lnRef>
-            <a:fillRef idx="0">
-              <a:schemeClr val="accent1"/>
-            </a:fillRef>
-            <a:effectRef idx="0">
-              <a:schemeClr val="accent1"/>
-            </a:effectRef>
-            <a:fontRef idx="minor">
-              <a:schemeClr val="tx1"/>
-            </a:fontRef>
-          </p:style>
-        </p:cxnSp>
-        <p:cxnSp>
-          <p:nvCxnSpPr>
-            <p:cNvPr id="159" name="Gerader Verbinder 158">
-              <a:extLst>
-                <a:ext uri="{FF2B5EF4-FFF2-40B4-BE49-F238E27FC236}">
-                  <a16:creationId xmlns:a16="http://schemas.microsoft.com/office/drawing/2014/main" id="{AED6C9B5-E7FD-4BC0-B2B1-86DA6F5BFB6C}"/>
-                </a:ext>
-              </a:extLst>
-            </p:cNvPr>
-            <p:cNvCxnSpPr/>
-            <p:nvPr/>
-          </p:nvCxnSpPr>
-          <p:spPr>
-            <a:xfrm>
-              <a:off x="10715908" y="3377269"/>
-              <a:ext cx="0" cy="100739"/>
-            </a:xfrm>
-            <a:prstGeom prst="line">
-              <a:avLst/>
-            </a:prstGeom>
-            <a:ln w="25400">
-              <a:solidFill>
-                <a:schemeClr val="tx1"/>
-              </a:solidFill>
-            </a:ln>
-          </p:spPr>
-          <p:style>
-            <a:lnRef idx="1">
-              <a:schemeClr val="accent1"/>
-            </a:lnRef>
-            <a:fillRef idx="0">
-              <a:schemeClr val="accent1"/>
-            </a:fillRef>
-            <a:effectRef idx="0">
-              <a:schemeClr val="accent1"/>
-            </a:effectRef>
-            <a:fontRef idx="minor">
-              <a:schemeClr val="tx1"/>
-            </a:fontRef>
-          </p:style>
-        </p:cxnSp>
-        <p:cxnSp>
-          <p:nvCxnSpPr>
-            <p:cNvPr id="160" name="Gerader Verbinder 159">
-              <a:extLst>
-                <a:ext uri="{FF2B5EF4-FFF2-40B4-BE49-F238E27FC236}">
-                  <a16:creationId xmlns:a16="http://schemas.microsoft.com/office/drawing/2014/main" id="{C5621B52-7E89-E2E4-DD36-DF0EA7F4DE4B}"/>
-                </a:ext>
-              </a:extLst>
-            </p:cNvPr>
-            <p:cNvCxnSpPr/>
-            <p:nvPr/>
-          </p:nvCxnSpPr>
-          <p:spPr>
-            <a:xfrm>
-              <a:off x="11275978" y="3377269"/>
-              <a:ext cx="0" cy="100739"/>
-            </a:xfrm>
-            <a:prstGeom prst="line">
-              <a:avLst/>
-            </a:prstGeom>
-            <a:ln w="25400">
-              <a:solidFill>
-                <a:schemeClr val="tx1"/>
-              </a:solidFill>
-            </a:ln>
-          </p:spPr>
-          <p:style>
-            <a:lnRef idx="1">
-              <a:schemeClr val="accent1"/>
-            </a:lnRef>
-            <a:fillRef idx="0">
-              <a:schemeClr val="accent1"/>
-            </a:fillRef>
-            <a:effectRef idx="0">
-              <a:schemeClr val="accent1"/>
-            </a:effectRef>
-            <a:fontRef idx="minor">
-              <a:schemeClr val="tx1"/>
-            </a:fontRef>
-          </p:style>
-        </p:cxnSp>
-        <p:cxnSp>
-          <p:nvCxnSpPr>
-            <p:cNvPr id="161" name="Gerader Verbinder 160">
-              <a:extLst>
-                <a:ext uri="{FF2B5EF4-FFF2-40B4-BE49-F238E27FC236}">
-                  <a16:creationId xmlns:a16="http://schemas.microsoft.com/office/drawing/2014/main" id="{428592DF-C37A-A89C-D33C-BA438B550FEE}"/>
-                </a:ext>
-              </a:extLst>
-            </p:cNvPr>
-            <p:cNvCxnSpPr/>
-            <p:nvPr/>
-          </p:nvCxnSpPr>
-          <p:spPr>
-            <a:xfrm>
-              <a:off x="11836048" y="3377269"/>
-              <a:ext cx="0" cy="100739"/>
-            </a:xfrm>
-            <a:prstGeom prst="line">
-              <a:avLst/>
-            </a:prstGeom>
-            <a:ln w="25400">
-              <a:solidFill>
-                <a:schemeClr val="tx1"/>
-              </a:solidFill>
-            </a:ln>
-          </p:spPr>
-          <p:style>
-            <a:lnRef idx="1">
-              <a:schemeClr val="accent1"/>
-            </a:lnRef>
-            <a:fillRef idx="0">
-              <a:schemeClr val="accent1"/>
-            </a:fillRef>
-            <a:effectRef idx="0">
-              <a:schemeClr val="accent1"/>
-            </a:effectRef>
-            <a:fontRef idx="minor">
-              <a:schemeClr val="tx1"/>
-            </a:fontRef>
-          </p:style>
-        </p:cxnSp>
-        <p:sp>
-          <p:nvSpPr>
-            <p:cNvPr id="162" name="Textfeld 161">
-              <a:extLst>
-                <a:ext uri="{FF2B5EF4-FFF2-40B4-BE49-F238E27FC236}">
-                  <a16:creationId xmlns:a16="http://schemas.microsoft.com/office/drawing/2014/main" id="{45F96C64-9178-77DA-EFE6-73C60CA123CC}"/>
-                </a:ext>
-              </a:extLst>
-            </p:cNvPr>
-            <p:cNvSpPr txBox="1"/>
-            <p:nvPr/>
-          </p:nvSpPr>
-          <p:spPr>
-            <a:xfrm>
-              <a:off x="9945563" y="3456454"/>
-              <a:ext cx="413896" cy="430887"/>
-            </a:xfrm>
-            <a:prstGeom prst="rect">
-              <a:avLst/>
-            </a:prstGeom>
-            <a:noFill/>
-          </p:spPr>
-          <p:txBody>
-            <a:bodyPr wrap="none" rtlCol="0">
-              <a:spAutoFit/>
-            </a:bodyPr>
-            <a:lstStyle/>
-            <a:p>
-              <a:r>
-                <a:rPr lang="en-US" sz="2200" dirty="0"/>
-                <a:t>-1</a:t>
-              </a:r>
-            </a:p>
-          </p:txBody>
-        </p:sp>
-        <p:sp>
-          <p:nvSpPr>
-            <p:cNvPr id="167" name="Textfeld 166">
-              <a:extLst>
-                <a:ext uri="{FF2B5EF4-FFF2-40B4-BE49-F238E27FC236}">
-                  <a16:creationId xmlns:a16="http://schemas.microsoft.com/office/drawing/2014/main" id="{7D0EB7DB-2FBF-65EC-5CCE-4D8CC922B66D}"/>
-                </a:ext>
-              </a:extLst>
-            </p:cNvPr>
-            <p:cNvSpPr txBox="1"/>
-            <p:nvPr/>
-          </p:nvSpPr>
-          <p:spPr>
-            <a:xfrm>
-              <a:off x="10550475" y="3456454"/>
-              <a:ext cx="327334" cy="430887"/>
-            </a:xfrm>
-            <a:prstGeom prst="rect">
-              <a:avLst/>
-            </a:prstGeom>
-            <a:noFill/>
-          </p:spPr>
-          <p:txBody>
-            <a:bodyPr wrap="none" rtlCol="0">
-              <a:spAutoFit/>
-            </a:bodyPr>
-            <a:lstStyle/>
-            <a:p>
-              <a:r>
-                <a:rPr lang="en-US" sz="2200" dirty="0"/>
-                <a:t>0</a:t>
-              </a:r>
-            </a:p>
-          </p:txBody>
-        </p:sp>
-        <p:sp>
-          <p:nvSpPr>
-            <p:cNvPr id="168" name="Textfeld 167">
-              <a:extLst>
-                <a:ext uri="{FF2B5EF4-FFF2-40B4-BE49-F238E27FC236}">
-                  <a16:creationId xmlns:a16="http://schemas.microsoft.com/office/drawing/2014/main" id="{5F2D7893-7EE1-E6BB-27BF-982448787F5E}"/>
-                </a:ext>
-              </a:extLst>
-            </p:cNvPr>
-            <p:cNvSpPr txBox="1"/>
-            <p:nvPr/>
-          </p:nvSpPr>
-          <p:spPr>
-            <a:xfrm>
-              <a:off x="11112795" y="3437550"/>
-              <a:ext cx="327334" cy="430887"/>
-            </a:xfrm>
-            <a:prstGeom prst="rect">
-              <a:avLst/>
-            </a:prstGeom>
-            <a:noFill/>
-          </p:spPr>
-          <p:txBody>
-            <a:bodyPr wrap="none" rtlCol="0">
-              <a:spAutoFit/>
-            </a:bodyPr>
-            <a:lstStyle/>
-            <a:p>
-              <a:r>
-                <a:rPr lang="en-US" sz="2200" dirty="0"/>
-                <a:t>1</a:t>
-              </a:r>
-            </a:p>
-          </p:txBody>
-        </p:sp>
-        <p:sp>
-          <p:nvSpPr>
-            <p:cNvPr id="189" name="Textfeld 188">
-              <a:extLst>
-                <a:ext uri="{FF2B5EF4-FFF2-40B4-BE49-F238E27FC236}">
-                  <a16:creationId xmlns:a16="http://schemas.microsoft.com/office/drawing/2014/main" id="{99B60D59-9D3A-642C-BEEE-39C0D5EA4BCA}"/>
-                </a:ext>
-              </a:extLst>
-            </p:cNvPr>
-            <p:cNvSpPr txBox="1"/>
-            <p:nvPr/>
-          </p:nvSpPr>
-          <p:spPr>
-            <a:xfrm>
-              <a:off x="11677654" y="3437550"/>
-              <a:ext cx="327334" cy="430887"/>
-            </a:xfrm>
-            <a:prstGeom prst="rect">
-              <a:avLst/>
-            </a:prstGeom>
-            <a:noFill/>
-          </p:spPr>
-          <p:txBody>
-            <a:bodyPr wrap="none" rtlCol="0">
-              <a:spAutoFit/>
-            </a:bodyPr>
-            <a:lstStyle/>
-            <a:p>
-              <a:r>
-                <a:rPr lang="en-US" sz="2200" dirty="0"/>
-                <a:t>2</a:t>
-              </a:r>
-            </a:p>
-          </p:txBody>
-        </p:sp>
-        <p:grpSp>
-          <p:nvGrpSpPr>
-            <p:cNvPr id="190" name="Gruppieren 189">
-              <a:extLst>
-                <a:ext uri="{FF2B5EF4-FFF2-40B4-BE49-F238E27FC236}">
-                  <a16:creationId xmlns:a16="http://schemas.microsoft.com/office/drawing/2014/main" id="{58BCB985-40E3-D582-A8F1-659338EF34F3}"/>
+                  <a16:creationId xmlns:a16="http://schemas.microsoft.com/office/drawing/2014/main" id="{8BF09BEE-8AB2-8DF0-DC19-895217BC1EB6}"/>
                 </a:ext>
               </a:extLst>
             </p:cNvPr>
@@ -21598,219 +21601,219 @@
           </p:nvGrpSpPr>
           <p:grpSpPr>
             <a:xfrm>
-              <a:off x="10445299" y="1476095"/>
-              <a:ext cx="1457860" cy="144000"/>
-              <a:chOff x="10678894" y="3153436"/>
-              <a:chExt cx="1457860" cy="144000"/>
+              <a:off x="10678894" y="3171529"/>
+              <a:ext cx="1457860" cy="100739"/>
+              <a:chOff x="10790345" y="3175067"/>
+              <a:chExt cx="1229904" cy="100739"/>
             </a:xfrm>
           </p:grpSpPr>
-          <p:grpSp>
-            <p:nvGrpSpPr>
-              <p:cNvPr id="212" name="Gruppieren 211">
+          <p:cxnSp>
+            <p:nvCxnSpPr>
+              <p:cNvPr id="214" name="Gerader Verbinder 213">
                 <a:extLst>
                   <a:ext uri="{FF2B5EF4-FFF2-40B4-BE49-F238E27FC236}">
-                    <a16:creationId xmlns:a16="http://schemas.microsoft.com/office/drawing/2014/main" id="{8BF09BEE-8AB2-8DF0-DC19-895217BC1EB6}"/>
+                    <a16:creationId xmlns:a16="http://schemas.microsoft.com/office/drawing/2014/main" id="{24719486-B49E-43C8-A964-77C83D5777A4}"/>
                   </a:ext>
                 </a:extLst>
               </p:cNvPr>
-              <p:cNvGrpSpPr/>
+              <p:cNvCxnSpPr>
+                <a:cxnSpLocks/>
+              </p:cNvCxnSpPr>
               <p:nvPr/>
-            </p:nvGrpSpPr>
-            <p:grpSpPr>
-              <a:xfrm>
-                <a:off x="10678894" y="3171529"/>
-                <a:ext cx="1457860" cy="100739"/>
-                <a:chOff x="10790345" y="3175067"/>
-                <a:chExt cx="1229904" cy="100739"/>
-              </a:xfrm>
-            </p:grpSpPr>
-            <p:cxnSp>
-              <p:nvCxnSpPr>
-                <p:cNvPr id="214" name="Gerader Verbinder 213">
-                  <a:extLst>
-                    <a:ext uri="{FF2B5EF4-FFF2-40B4-BE49-F238E27FC236}">
-                      <a16:creationId xmlns:a16="http://schemas.microsoft.com/office/drawing/2014/main" id="{24719486-B49E-43C8-A964-77C83D5777A4}"/>
-                    </a:ext>
-                  </a:extLst>
-                </p:cNvPr>
-                <p:cNvCxnSpPr>
-                  <a:cxnSpLocks/>
-                </p:cNvCxnSpPr>
-                <p:nvPr/>
-              </p:nvCxnSpPr>
-              <p:spPr>
-                <a:xfrm>
-                  <a:off x="10792872" y="3225437"/>
-                  <a:ext cx="1227377" cy="0"/>
-                </a:xfrm>
-                <a:prstGeom prst="line">
-                  <a:avLst/>
-                </a:prstGeom>
-                <a:ln w="31750">
-                  <a:solidFill>
-                    <a:schemeClr val="tx1"/>
-                  </a:solidFill>
-                </a:ln>
-              </p:spPr>
-              <p:style>
-                <a:lnRef idx="1">
-                  <a:schemeClr val="accent1"/>
-                </a:lnRef>
-                <a:fillRef idx="0">
-                  <a:schemeClr val="accent1"/>
-                </a:fillRef>
-                <a:effectRef idx="0">
-                  <a:schemeClr val="accent1"/>
-                </a:effectRef>
-                <a:fontRef idx="minor">
-                  <a:schemeClr val="tx1"/>
-                </a:fontRef>
-              </p:style>
-            </p:cxnSp>
-            <p:cxnSp>
-              <p:nvCxnSpPr>
-                <p:cNvPr id="215" name="Gerader Verbinder 214">
-                  <a:extLst>
-                    <a:ext uri="{FF2B5EF4-FFF2-40B4-BE49-F238E27FC236}">
-                      <a16:creationId xmlns:a16="http://schemas.microsoft.com/office/drawing/2014/main" id="{57655327-1266-B36B-CAD4-C129B6E8D8B0}"/>
-                    </a:ext>
-                  </a:extLst>
-                </p:cNvPr>
-                <p:cNvCxnSpPr/>
-                <p:nvPr/>
-              </p:nvCxnSpPr>
-              <p:spPr>
-                <a:xfrm>
-                  <a:off x="10790345" y="3175067"/>
-                  <a:ext cx="0" cy="100739"/>
-                </a:xfrm>
-                <a:prstGeom prst="line">
-                  <a:avLst/>
-                </a:prstGeom>
-                <a:ln w="31750">
-                  <a:solidFill>
-                    <a:schemeClr val="tx1"/>
-                  </a:solidFill>
-                </a:ln>
-              </p:spPr>
-              <p:style>
-                <a:lnRef idx="1">
-                  <a:schemeClr val="accent1"/>
-                </a:lnRef>
-                <a:fillRef idx="0">
-                  <a:schemeClr val="accent1"/>
-                </a:fillRef>
-                <a:effectRef idx="0">
-                  <a:schemeClr val="accent1"/>
-                </a:effectRef>
-                <a:fontRef idx="minor">
-                  <a:schemeClr val="tx1"/>
-                </a:fontRef>
-              </p:style>
-            </p:cxnSp>
-            <p:cxnSp>
-              <p:nvCxnSpPr>
-                <p:cNvPr id="216" name="Gerader Verbinder 215">
-                  <a:extLst>
-                    <a:ext uri="{FF2B5EF4-FFF2-40B4-BE49-F238E27FC236}">
-                      <a16:creationId xmlns:a16="http://schemas.microsoft.com/office/drawing/2014/main" id="{C53F632B-2429-8CE9-64DE-38891EF19BC4}"/>
-                    </a:ext>
-                  </a:extLst>
-                </p:cNvPr>
-                <p:cNvCxnSpPr/>
-                <p:nvPr/>
-              </p:nvCxnSpPr>
-              <p:spPr>
-                <a:xfrm>
-                  <a:off x="12020249" y="3175067"/>
-                  <a:ext cx="0" cy="100739"/>
-                </a:xfrm>
-                <a:prstGeom prst="line">
-                  <a:avLst/>
-                </a:prstGeom>
-                <a:ln w="31750">
-                  <a:solidFill>
-                    <a:schemeClr val="tx1"/>
-                  </a:solidFill>
-                </a:ln>
-              </p:spPr>
-              <p:style>
-                <a:lnRef idx="1">
-                  <a:schemeClr val="accent1"/>
-                </a:lnRef>
-                <a:fillRef idx="0">
-                  <a:schemeClr val="accent1"/>
-                </a:fillRef>
-                <a:effectRef idx="0">
-                  <a:schemeClr val="accent1"/>
-                </a:effectRef>
-                <a:fontRef idx="minor">
-                  <a:schemeClr val="tx1"/>
-                </a:fontRef>
-              </p:style>
-            </p:cxnSp>
-          </p:grpSp>
-          <p:sp>
-            <p:nvSpPr>
-              <p:cNvPr id="213" name="Ellipse 212">
-                <a:extLst>
-                  <a:ext uri="{FF2B5EF4-FFF2-40B4-BE49-F238E27FC236}">
-                    <a16:creationId xmlns:a16="http://schemas.microsoft.com/office/drawing/2014/main" id="{43602ED4-9067-318B-9329-D00CA7821568}"/>
-                  </a:ext>
-                </a:extLst>
-              </p:cNvPr>
-              <p:cNvSpPr>
-                <a:spLocks noChangeAspect="1"/>
-              </p:cNvSpPr>
-              <p:nvPr/>
-            </p:nvSpPr>
+            </p:nvCxnSpPr>
             <p:spPr>
               <a:xfrm>
-                <a:off x="11334946" y="3153436"/>
-                <a:ext cx="143228" cy="144000"/>
+                <a:off x="10792872" y="3225437"/>
+                <a:ext cx="1227377" cy="0"/>
               </a:xfrm>
-              <a:prstGeom prst="ellipse">
+              <a:prstGeom prst="line">
                 <a:avLst/>
               </a:prstGeom>
-              <a:solidFill>
-                <a:schemeClr val="tx1"/>
-              </a:solidFill>
-              <a:ln>
-                <a:noFill/>
+              <a:ln w="31750">
+                <a:solidFill>
+                  <a:schemeClr val="tx1"/>
+                </a:solidFill>
               </a:ln>
             </p:spPr>
             <p:style>
-              <a:lnRef idx="2">
-                <a:schemeClr val="accent1">
-                  <a:shade val="15000"/>
-                </a:schemeClr>
+              <a:lnRef idx="1">
+                <a:schemeClr val="accent1"/>
               </a:lnRef>
-              <a:fillRef idx="1">
+              <a:fillRef idx="0">
                 <a:schemeClr val="accent1"/>
               </a:fillRef>
               <a:effectRef idx="0">
                 <a:schemeClr val="accent1"/>
               </a:effectRef>
               <a:fontRef idx="minor">
-                <a:schemeClr val="lt1"/>
+                <a:schemeClr val="tx1"/>
               </a:fontRef>
             </p:style>
-            <p:txBody>
-              <a:bodyPr rtlCol="0" anchor="ctr"/>
-              <a:lstStyle/>
-              <a:p>
-                <a:pPr algn="ctr"/>
-                <a:endParaRPr lang="en-US"/>
-              </a:p>
-            </p:txBody>
-          </p:sp>
+          </p:cxnSp>
+          <p:cxnSp>
+            <p:nvCxnSpPr>
+              <p:cNvPr id="215" name="Gerader Verbinder 214">
+                <a:extLst>
+                  <a:ext uri="{FF2B5EF4-FFF2-40B4-BE49-F238E27FC236}">
+                    <a16:creationId xmlns:a16="http://schemas.microsoft.com/office/drawing/2014/main" id="{57655327-1266-B36B-CAD4-C129B6E8D8B0}"/>
+                  </a:ext>
+                </a:extLst>
+              </p:cNvPr>
+              <p:cNvCxnSpPr/>
+              <p:nvPr/>
+            </p:nvCxnSpPr>
+            <p:spPr>
+              <a:xfrm>
+                <a:off x="10790345" y="3175067"/>
+                <a:ext cx="0" cy="100739"/>
+              </a:xfrm>
+              <a:prstGeom prst="line">
+                <a:avLst/>
+              </a:prstGeom>
+              <a:ln w="31750">
+                <a:solidFill>
+                  <a:schemeClr val="tx1"/>
+                </a:solidFill>
+              </a:ln>
+            </p:spPr>
+            <p:style>
+              <a:lnRef idx="1">
+                <a:schemeClr val="accent1"/>
+              </a:lnRef>
+              <a:fillRef idx="0">
+                <a:schemeClr val="accent1"/>
+              </a:fillRef>
+              <a:effectRef idx="0">
+                <a:schemeClr val="accent1"/>
+              </a:effectRef>
+              <a:fontRef idx="minor">
+                <a:schemeClr val="tx1"/>
+              </a:fontRef>
+            </p:style>
+          </p:cxnSp>
+          <p:cxnSp>
+            <p:nvCxnSpPr>
+              <p:cNvPr id="216" name="Gerader Verbinder 215">
+                <a:extLst>
+                  <a:ext uri="{FF2B5EF4-FFF2-40B4-BE49-F238E27FC236}">
+                    <a16:creationId xmlns:a16="http://schemas.microsoft.com/office/drawing/2014/main" id="{C53F632B-2429-8CE9-64DE-38891EF19BC4}"/>
+                  </a:ext>
+                </a:extLst>
+              </p:cNvPr>
+              <p:cNvCxnSpPr/>
+              <p:nvPr/>
+            </p:nvCxnSpPr>
+            <p:spPr>
+              <a:xfrm>
+                <a:off x="12020249" y="3175067"/>
+                <a:ext cx="0" cy="100739"/>
+              </a:xfrm>
+              <a:prstGeom prst="line">
+                <a:avLst/>
+              </a:prstGeom>
+              <a:ln w="31750">
+                <a:solidFill>
+                  <a:schemeClr val="tx1"/>
+                </a:solidFill>
+              </a:ln>
+            </p:spPr>
+            <p:style>
+              <a:lnRef idx="1">
+                <a:schemeClr val="accent1"/>
+              </a:lnRef>
+              <a:fillRef idx="0">
+                <a:schemeClr val="accent1"/>
+              </a:fillRef>
+              <a:effectRef idx="0">
+                <a:schemeClr val="accent1"/>
+              </a:effectRef>
+              <a:fontRef idx="minor">
+                <a:schemeClr val="tx1"/>
+              </a:fontRef>
+            </p:style>
+          </p:cxnSp>
         </p:grpSp>
+        <p:sp>
+          <p:nvSpPr>
+            <p:cNvPr id="213" name="Ellipse 212">
+              <a:extLst>
+                <a:ext uri="{FF2B5EF4-FFF2-40B4-BE49-F238E27FC236}">
+                  <a16:creationId xmlns:a16="http://schemas.microsoft.com/office/drawing/2014/main" id="{43602ED4-9067-318B-9329-D00CA7821568}"/>
+                </a:ext>
+              </a:extLst>
+            </p:cNvPr>
+            <p:cNvSpPr>
+              <a:spLocks noChangeAspect="1"/>
+            </p:cNvSpPr>
+            <p:nvPr/>
+          </p:nvSpPr>
+          <p:spPr>
+            <a:xfrm>
+              <a:off x="11334946" y="3153436"/>
+              <a:ext cx="143228" cy="144000"/>
+            </a:xfrm>
+            <a:prstGeom prst="ellipse">
+              <a:avLst/>
+            </a:prstGeom>
+            <a:solidFill>
+              <a:schemeClr val="tx1"/>
+            </a:solidFill>
+            <a:ln>
+              <a:noFill/>
+            </a:ln>
+          </p:spPr>
+          <p:style>
+            <a:lnRef idx="2">
+              <a:schemeClr val="accent1">
+                <a:shade val="15000"/>
+              </a:schemeClr>
+            </a:lnRef>
+            <a:fillRef idx="1">
+              <a:schemeClr val="accent1"/>
+            </a:fillRef>
+            <a:effectRef idx="0">
+              <a:schemeClr val="accent1"/>
+            </a:effectRef>
+            <a:fontRef idx="minor">
+              <a:schemeClr val="lt1"/>
+            </a:fontRef>
+          </p:style>
+          <p:txBody>
+            <a:bodyPr rtlCol="0" anchor="ctr"/>
+            <a:lstStyle/>
+            <a:p>
+              <a:pPr algn="ctr"/>
+              <a:endParaRPr lang="en-US"/>
+            </a:p>
+          </p:txBody>
+        </p:sp>
+      </p:grpSp>
+      <p:grpSp>
+        <p:nvGrpSpPr>
+          <p:cNvPr id="193" name="Gruppieren 192">
+            <a:extLst>
+              <a:ext uri="{FF2B5EF4-FFF2-40B4-BE49-F238E27FC236}">
+                <a16:creationId xmlns:a16="http://schemas.microsoft.com/office/drawing/2014/main" id="{79D21A8F-7E4F-184A-2F95-98757DCCE879}"/>
+              </a:ext>
+            </a:extLst>
+          </p:cNvPr>
+          <p:cNvGrpSpPr/>
+          <p:nvPr/>
+        </p:nvGrpSpPr>
+        <p:grpSpPr>
+          <a:xfrm>
+            <a:off x="10902012" y="2986427"/>
+            <a:ext cx="930750" cy="144000"/>
+            <a:chOff x="11206004" y="3841346"/>
+            <a:chExt cx="930750" cy="144000"/>
+          </a:xfrm>
+        </p:grpSpPr>
         <p:grpSp>
           <p:nvGrpSpPr>
-            <p:cNvPr id="191" name="Gruppieren 190">
+            <p:cNvPr id="202" name="Gruppieren 201">
               <a:extLst>
                 <a:ext uri="{FF2B5EF4-FFF2-40B4-BE49-F238E27FC236}">
-                  <a16:creationId xmlns:a16="http://schemas.microsoft.com/office/drawing/2014/main" id="{D3CA1D7E-A0BA-6C96-A365-7929B91E61FD}"/>
+                  <a16:creationId xmlns:a16="http://schemas.microsoft.com/office/drawing/2014/main" id="{E09007A7-06E5-B84F-7FB5-D1FC089A50BE}"/>
                 </a:ext>
               </a:extLst>
             </p:cNvPr>
@@ -21819,815 +21822,573 @@
           </p:nvGrpSpPr>
           <p:grpSpPr>
             <a:xfrm>
-              <a:off x="11139958" y="2244464"/>
-              <a:ext cx="679606" cy="144000"/>
-              <a:chOff x="11137108" y="2719483"/>
-              <a:chExt cx="679606" cy="144000"/>
+              <a:off x="11206004" y="3869286"/>
+              <a:ext cx="930750" cy="100739"/>
+              <a:chOff x="10861959" y="2769054"/>
+              <a:chExt cx="1229904" cy="100739"/>
             </a:xfrm>
           </p:grpSpPr>
-          <p:grpSp>
-            <p:nvGrpSpPr>
-              <p:cNvPr id="207" name="Gruppieren 206">
+          <p:cxnSp>
+            <p:nvCxnSpPr>
+              <p:cNvPr id="204" name="Gerader Verbinder 203">
                 <a:extLst>
                   <a:ext uri="{FF2B5EF4-FFF2-40B4-BE49-F238E27FC236}">
-                    <a16:creationId xmlns:a16="http://schemas.microsoft.com/office/drawing/2014/main" id="{C32EBEEF-E35C-17A2-A86D-2223810CCF35}"/>
+                    <a16:creationId xmlns:a16="http://schemas.microsoft.com/office/drawing/2014/main" id="{343192D8-B6E3-C3A0-0B03-09504A7F4DB2}"/>
                   </a:ext>
                 </a:extLst>
               </p:cNvPr>
-              <p:cNvGrpSpPr/>
+              <p:cNvCxnSpPr>
+                <a:cxnSpLocks/>
+              </p:cNvCxnSpPr>
               <p:nvPr/>
-            </p:nvGrpSpPr>
-            <p:grpSpPr>
-              <a:xfrm>
-                <a:off x="11137108" y="2747423"/>
-                <a:ext cx="679606" cy="100739"/>
-                <a:chOff x="10861959" y="2769054"/>
-                <a:chExt cx="1229904" cy="100739"/>
-              </a:xfrm>
-            </p:grpSpPr>
-            <p:cxnSp>
-              <p:nvCxnSpPr>
-                <p:cNvPr id="209" name="Gerader Verbinder 208">
-                  <a:extLst>
-                    <a:ext uri="{FF2B5EF4-FFF2-40B4-BE49-F238E27FC236}">
-                      <a16:creationId xmlns:a16="http://schemas.microsoft.com/office/drawing/2014/main" id="{A6213C49-8757-C7E8-12AC-C655DE224E53}"/>
-                    </a:ext>
-                  </a:extLst>
-                </p:cNvPr>
-                <p:cNvCxnSpPr>
-                  <a:cxnSpLocks/>
-                </p:cNvCxnSpPr>
-                <p:nvPr/>
-              </p:nvCxnSpPr>
-              <p:spPr>
-                <a:xfrm>
-                  <a:off x="10864486" y="2819424"/>
-                  <a:ext cx="1227377" cy="0"/>
-                </a:xfrm>
-                <a:prstGeom prst="line">
-                  <a:avLst/>
-                </a:prstGeom>
-                <a:ln w="31750">
-                  <a:solidFill>
-                    <a:schemeClr val="tx1"/>
-                  </a:solidFill>
-                </a:ln>
-              </p:spPr>
-              <p:style>
-                <a:lnRef idx="1">
-                  <a:schemeClr val="accent1"/>
-                </a:lnRef>
-                <a:fillRef idx="0">
-                  <a:schemeClr val="accent1"/>
-                </a:fillRef>
-                <a:effectRef idx="0">
-                  <a:schemeClr val="accent1"/>
-                </a:effectRef>
-                <a:fontRef idx="minor">
-                  <a:schemeClr val="tx1"/>
-                </a:fontRef>
-              </p:style>
-            </p:cxnSp>
-            <p:cxnSp>
-              <p:nvCxnSpPr>
-                <p:cNvPr id="210" name="Gerader Verbinder 209">
-                  <a:extLst>
-                    <a:ext uri="{FF2B5EF4-FFF2-40B4-BE49-F238E27FC236}">
-                      <a16:creationId xmlns:a16="http://schemas.microsoft.com/office/drawing/2014/main" id="{53ABCBEB-52EF-57CE-B2B5-CF78D1532BBA}"/>
-                    </a:ext>
-                  </a:extLst>
-                </p:cNvPr>
-                <p:cNvCxnSpPr/>
-                <p:nvPr/>
-              </p:nvCxnSpPr>
-              <p:spPr>
-                <a:xfrm>
-                  <a:off x="10861959" y="2769054"/>
-                  <a:ext cx="0" cy="100739"/>
-                </a:xfrm>
-                <a:prstGeom prst="line">
-                  <a:avLst/>
-                </a:prstGeom>
-                <a:ln w="31750">
-                  <a:solidFill>
-                    <a:schemeClr val="tx1"/>
-                  </a:solidFill>
-                </a:ln>
-              </p:spPr>
-              <p:style>
-                <a:lnRef idx="1">
-                  <a:schemeClr val="accent1"/>
-                </a:lnRef>
-                <a:fillRef idx="0">
-                  <a:schemeClr val="accent1"/>
-                </a:fillRef>
-                <a:effectRef idx="0">
-                  <a:schemeClr val="accent1"/>
-                </a:effectRef>
-                <a:fontRef idx="minor">
-                  <a:schemeClr val="tx1"/>
-                </a:fontRef>
-              </p:style>
-            </p:cxnSp>
-            <p:cxnSp>
-              <p:nvCxnSpPr>
-                <p:cNvPr id="211" name="Gerader Verbinder 210">
-                  <a:extLst>
-                    <a:ext uri="{FF2B5EF4-FFF2-40B4-BE49-F238E27FC236}">
-                      <a16:creationId xmlns:a16="http://schemas.microsoft.com/office/drawing/2014/main" id="{A5C6850E-F164-2FBF-1B00-91B0DEE0438C}"/>
-                    </a:ext>
-                  </a:extLst>
-                </p:cNvPr>
-                <p:cNvCxnSpPr/>
-                <p:nvPr/>
-              </p:nvCxnSpPr>
-              <p:spPr>
-                <a:xfrm>
-                  <a:off x="12091863" y="2769054"/>
-                  <a:ext cx="0" cy="100739"/>
-                </a:xfrm>
-                <a:prstGeom prst="line">
-                  <a:avLst/>
-                </a:prstGeom>
-                <a:ln w="31750">
-                  <a:solidFill>
-                    <a:schemeClr val="tx1"/>
-                  </a:solidFill>
-                </a:ln>
-              </p:spPr>
-              <p:style>
-                <a:lnRef idx="1">
-                  <a:schemeClr val="accent1"/>
-                </a:lnRef>
-                <a:fillRef idx="0">
-                  <a:schemeClr val="accent1"/>
-                </a:fillRef>
-                <a:effectRef idx="0">
-                  <a:schemeClr val="accent1"/>
-                </a:effectRef>
-                <a:fontRef idx="minor">
-                  <a:schemeClr val="tx1"/>
-                </a:fontRef>
-              </p:style>
-            </p:cxnSp>
-          </p:grpSp>
-          <p:sp>
-            <p:nvSpPr>
-              <p:cNvPr id="208" name="Ellipse 207">
-                <a:extLst>
-                  <a:ext uri="{FF2B5EF4-FFF2-40B4-BE49-F238E27FC236}">
-                    <a16:creationId xmlns:a16="http://schemas.microsoft.com/office/drawing/2014/main" id="{DDF638B9-2F3C-78E5-BDDB-4CE7CCF822BF}"/>
-                  </a:ext>
-                </a:extLst>
-              </p:cNvPr>
-              <p:cNvSpPr>
-                <a:spLocks noChangeAspect="1"/>
-              </p:cNvSpPr>
-              <p:nvPr/>
-            </p:nvSpPr>
+            </p:nvCxnSpPr>
             <p:spPr>
               <a:xfrm>
-                <a:off x="11406560" y="2719483"/>
-                <a:ext cx="143228" cy="144000"/>
+                <a:off x="10864486" y="2819424"/>
+                <a:ext cx="1227377" cy="0"/>
               </a:xfrm>
-              <a:prstGeom prst="ellipse">
+              <a:prstGeom prst="line">
                 <a:avLst/>
               </a:prstGeom>
-              <a:solidFill>
-                <a:schemeClr val="tx1"/>
-              </a:solidFill>
-              <a:ln>
-                <a:noFill/>
+              <a:ln w="31750">
+                <a:solidFill>
+                  <a:schemeClr val="tx1"/>
+                </a:solidFill>
               </a:ln>
             </p:spPr>
             <p:style>
-              <a:lnRef idx="2">
-                <a:schemeClr val="accent1">
-                  <a:shade val="15000"/>
-                </a:schemeClr>
+              <a:lnRef idx="1">
+                <a:schemeClr val="accent1"/>
               </a:lnRef>
-              <a:fillRef idx="1">
+              <a:fillRef idx="0">
                 <a:schemeClr val="accent1"/>
               </a:fillRef>
               <a:effectRef idx="0">
                 <a:schemeClr val="accent1"/>
               </a:effectRef>
               <a:fontRef idx="minor">
-                <a:schemeClr val="lt1"/>
+                <a:schemeClr val="tx1"/>
               </a:fontRef>
             </p:style>
-            <p:txBody>
-              <a:bodyPr rtlCol="0" anchor="ctr"/>
-              <a:lstStyle/>
-              <a:p>
-                <a:pPr algn="ctr"/>
-                <a:endParaRPr lang="en-US"/>
-              </a:p>
-            </p:txBody>
-          </p:sp>
-        </p:grpSp>
-        <p:grpSp>
-          <p:nvGrpSpPr>
-            <p:cNvPr id="193" name="Gruppieren 192">
-              <a:extLst>
-                <a:ext uri="{FF2B5EF4-FFF2-40B4-BE49-F238E27FC236}">
-                  <a16:creationId xmlns:a16="http://schemas.microsoft.com/office/drawing/2014/main" id="{79D21A8F-7E4F-184A-2F95-98757DCCE879}"/>
-                </a:ext>
-              </a:extLst>
-            </p:cNvPr>
-            <p:cNvGrpSpPr/>
-            <p:nvPr/>
-          </p:nvGrpSpPr>
-          <p:grpSpPr>
-            <a:xfrm>
-              <a:off x="10800412" y="2986427"/>
-              <a:ext cx="930750" cy="144000"/>
-              <a:chOff x="11206004" y="3841346"/>
-              <a:chExt cx="930750" cy="144000"/>
-            </a:xfrm>
-          </p:grpSpPr>
-          <p:grpSp>
-            <p:nvGrpSpPr>
-              <p:cNvPr id="202" name="Gruppieren 201">
+          </p:cxnSp>
+          <p:cxnSp>
+            <p:nvCxnSpPr>
+              <p:cNvPr id="205" name="Gerader Verbinder 204">
                 <a:extLst>
                   <a:ext uri="{FF2B5EF4-FFF2-40B4-BE49-F238E27FC236}">
-                    <a16:creationId xmlns:a16="http://schemas.microsoft.com/office/drawing/2014/main" id="{E09007A7-06E5-B84F-7FB5-D1FC089A50BE}"/>
+                    <a16:creationId xmlns:a16="http://schemas.microsoft.com/office/drawing/2014/main" id="{E27827A1-6532-09CE-C6E1-14A23520C39B}"/>
                   </a:ext>
                 </a:extLst>
               </p:cNvPr>
-              <p:cNvGrpSpPr/>
+              <p:cNvCxnSpPr/>
               <p:nvPr/>
-            </p:nvGrpSpPr>
-            <p:grpSpPr>
-              <a:xfrm>
-                <a:off x="11206004" y="3869286"/>
-                <a:ext cx="930750" cy="100739"/>
-                <a:chOff x="10861959" y="2769054"/>
-                <a:chExt cx="1229904" cy="100739"/>
-              </a:xfrm>
-            </p:grpSpPr>
-            <p:cxnSp>
-              <p:nvCxnSpPr>
-                <p:cNvPr id="204" name="Gerader Verbinder 203">
-                  <a:extLst>
-                    <a:ext uri="{FF2B5EF4-FFF2-40B4-BE49-F238E27FC236}">
-                      <a16:creationId xmlns:a16="http://schemas.microsoft.com/office/drawing/2014/main" id="{343192D8-B6E3-C3A0-0B03-09504A7F4DB2}"/>
-                    </a:ext>
-                  </a:extLst>
-                </p:cNvPr>
-                <p:cNvCxnSpPr>
-                  <a:cxnSpLocks/>
-                </p:cNvCxnSpPr>
-                <p:nvPr/>
-              </p:nvCxnSpPr>
-              <p:spPr>
-                <a:xfrm>
-                  <a:off x="10864486" y="2819424"/>
-                  <a:ext cx="1227377" cy="0"/>
-                </a:xfrm>
-                <a:prstGeom prst="line">
-                  <a:avLst/>
-                </a:prstGeom>
-                <a:ln w="31750">
-                  <a:solidFill>
-                    <a:schemeClr val="tx1"/>
-                  </a:solidFill>
-                </a:ln>
-              </p:spPr>
-              <p:style>
-                <a:lnRef idx="1">
-                  <a:schemeClr val="accent1"/>
-                </a:lnRef>
-                <a:fillRef idx="0">
-                  <a:schemeClr val="accent1"/>
-                </a:fillRef>
-                <a:effectRef idx="0">
-                  <a:schemeClr val="accent1"/>
-                </a:effectRef>
-                <a:fontRef idx="minor">
-                  <a:schemeClr val="tx1"/>
-                </a:fontRef>
-              </p:style>
-            </p:cxnSp>
-            <p:cxnSp>
-              <p:nvCxnSpPr>
-                <p:cNvPr id="205" name="Gerader Verbinder 204">
-                  <a:extLst>
-                    <a:ext uri="{FF2B5EF4-FFF2-40B4-BE49-F238E27FC236}">
-                      <a16:creationId xmlns:a16="http://schemas.microsoft.com/office/drawing/2014/main" id="{E27827A1-6532-09CE-C6E1-14A23520C39B}"/>
-                    </a:ext>
-                  </a:extLst>
-                </p:cNvPr>
-                <p:cNvCxnSpPr/>
-                <p:nvPr/>
-              </p:nvCxnSpPr>
-              <p:spPr>
-                <a:xfrm>
-                  <a:off x="10861959" y="2769054"/>
-                  <a:ext cx="0" cy="100739"/>
-                </a:xfrm>
-                <a:prstGeom prst="line">
-                  <a:avLst/>
-                </a:prstGeom>
-                <a:ln w="31750">
-                  <a:solidFill>
-                    <a:schemeClr val="tx1"/>
-                  </a:solidFill>
-                </a:ln>
-              </p:spPr>
-              <p:style>
-                <a:lnRef idx="1">
-                  <a:schemeClr val="accent1"/>
-                </a:lnRef>
-                <a:fillRef idx="0">
-                  <a:schemeClr val="accent1"/>
-                </a:fillRef>
-                <a:effectRef idx="0">
-                  <a:schemeClr val="accent1"/>
-                </a:effectRef>
-                <a:fontRef idx="minor">
-                  <a:schemeClr val="tx1"/>
-                </a:fontRef>
-              </p:style>
-            </p:cxnSp>
-            <p:cxnSp>
-              <p:nvCxnSpPr>
-                <p:cNvPr id="206" name="Gerader Verbinder 205">
-                  <a:extLst>
-                    <a:ext uri="{FF2B5EF4-FFF2-40B4-BE49-F238E27FC236}">
-                      <a16:creationId xmlns:a16="http://schemas.microsoft.com/office/drawing/2014/main" id="{2C6F3BA9-2D1F-B3FA-471D-F1EA07FF76A3}"/>
-                    </a:ext>
-                  </a:extLst>
-                </p:cNvPr>
-                <p:cNvCxnSpPr/>
-                <p:nvPr/>
-              </p:nvCxnSpPr>
-              <p:spPr>
-                <a:xfrm>
-                  <a:off x="12091863" y="2769054"/>
-                  <a:ext cx="0" cy="100739"/>
-                </a:xfrm>
-                <a:prstGeom prst="line">
-                  <a:avLst/>
-                </a:prstGeom>
-                <a:ln w="31750">
-                  <a:solidFill>
-                    <a:schemeClr val="tx1"/>
-                  </a:solidFill>
-                </a:ln>
-              </p:spPr>
-              <p:style>
-                <a:lnRef idx="1">
-                  <a:schemeClr val="accent1"/>
-                </a:lnRef>
-                <a:fillRef idx="0">
-                  <a:schemeClr val="accent1"/>
-                </a:fillRef>
-                <a:effectRef idx="0">
-                  <a:schemeClr val="accent1"/>
-                </a:effectRef>
-                <a:fontRef idx="minor">
-                  <a:schemeClr val="tx1"/>
-                </a:fontRef>
-              </p:style>
-            </p:cxnSp>
-          </p:grpSp>
-          <p:sp>
-            <p:nvSpPr>
-              <p:cNvPr id="203" name="Ellipse 202">
-                <a:extLst>
-                  <a:ext uri="{FF2B5EF4-FFF2-40B4-BE49-F238E27FC236}">
-                    <a16:creationId xmlns:a16="http://schemas.microsoft.com/office/drawing/2014/main" id="{0BE3A713-41A3-67CE-95A7-A5DBA0F78908}"/>
-                  </a:ext>
-                </a:extLst>
-              </p:cNvPr>
-              <p:cNvSpPr>
-                <a:spLocks noChangeAspect="1"/>
-              </p:cNvSpPr>
-              <p:nvPr/>
-            </p:nvSpPr>
+            </p:nvCxnSpPr>
             <p:spPr>
               <a:xfrm>
-                <a:off x="11601028" y="3841346"/>
-                <a:ext cx="143228" cy="144000"/>
+                <a:off x="10861959" y="2769054"/>
+                <a:ext cx="0" cy="100739"/>
               </a:xfrm>
-              <a:prstGeom prst="ellipse">
+              <a:prstGeom prst="line">
                 <a:avLst/>
               </a:prstGeom>
-              <a:solidFill>
-                <a:schemeClr val="tx1"/>
-              </a:solidFill>
-              <a:ln>
-                <a:noFill/>
+              <a:ln w="31750">
+                <a:solidFill>
+                  <a:schemeClr val="tx1"/>
+                </a:solidFill>
               </a:ln>
             </p:spPr>
             <p:style>
-              <a:lnRef idx="2">
-                <a:schemeClr val="accent1">
-                  <a:shade val="15000"/>
-                </a:schemeClr>
+              <a:lnRef idx="1">
+                <a:schemeClr val="accent1"/>
               </a:lnRef>
-              <a:fillRef idx="1">
+              <a:fillRef idx="0">
                 <a:schemeClr val="accent1"/>
               </a:fillRef>
               <a:effectRef idx="0">
                 <a:schemeClr val="accent1"/>
               </a:effectRef>
               <a:fontRef idx="minor">
-                <a:schemeClr val="lt1"/>
+                <a:schemeClr val="tx1"/>
               </a:fontRef>
             </p:style>
-            <p:txBody>
-              <a:bodyPr rtlCol="0" anchor="ctr"/>
-              <a:lstStyle/>
-              <a:p>
-                <a:pPr algn="ctr"/>
-                <a:endParaRPr lang="en-US"/>
-              </a:p>
-            </p:txBody>
-          </p:sp>
+          </p:cxnSp>
+          <p:cxnSp>
+            <p:nvCxnSpPr>
+              <p:cNvPr id="206" name="Gerader Verbinder 205">
+                <a:extLst>
+                  <a:ext uri="{FF2B5EF4-FFF2-40B4-BE49-F238E27FC236}">
+                    <a16:creationId xmlns:a16="http://schemas.microsoft.com/office/drawing/2014/main" id="{2C6F3BA9-2D1F-B3FA-471D-F1EA07FF76A3}"/>
+                  </a:ext>
+                </a:extLst>
+              </p:cNvPr>
+              <p:cNvCxnSpPr/>
+              <p:nvPr/>
+            </p:nvCxnSpPr>
+            <p:spPr>
+              <a:xfrm>
+                <a:off x="12091863" y="2769054"/>
+                <a:ext cx="0" cy="100739"/>
+              </a:xfrm>
+              <a:prstGeom prst="line">
+                <a:avLst/>
+              </a:prstGeom>
+              <a:ln w="31750">
+                <a:solidFill>
+                  <a:schemeClr val="tx1"/>
+                </a:solidFill>
+              </a:ln>
+            </p:spPr>
+            <p:style>
+              <a:lnRef idx="1">
+                <a:schemeClr val="accent1"/>
+              </a:lnRef>
+              <a:fillRef idx="0">
+                <a:schemeClr val="accent1"/>
+              </a:fillRef>
+              <a:effectRef idx="0">
+                <a:schemeClr val="accent1"/>
+              </a:effectRef>
+              <a:fontRef idx="minor">
+                <a:schemeClr val="tx1"/>
+              </a:fontRef>
+            </p:style>
+          </p:cxnSp>
         </p:grpSp>
-        <mc:AlternateContent xmlns:mc="http://schemas.openxmlformats.org/markup-compatibility/2006">
-          <mc:Choice xmlns:a14="http://schemas.microsoft.com/office/drawing/2010/main" Requires="a14">
-            <p:sp>
-              <p:nvSpPr>
-                <p:cNvPr id="198" name="Textfeld 197">
-                  <a:extLst>
-                    <a:ext uri="{FF2B5EF4-FFF2-40B4-BE49-F238E27FC236}">
-                      <a16:creationId xmlns:a16="http://schemas.microsoft.com/office/drawing/2014/main" id="{AF7BE3C3-DE73-1844-C868-A05C931C8973}"/>
-                    </a:ext>
-                  </a:extLst>
-                </p:cNvPr>
-                <p:cNvSpPr txBox="1"/>
-                <p:nvPr/>
-              </p:nvSpPr>
-              <p:spPr>
-                <a:xfrm>
-                  <a:off x="9700026" y="1308446"/>
-                  <a:ext cx="520527" cy="430887"/>
-                </a:xfrm>
-                <a:prstGeom prst="rect">
-                  <a:avLst/>
-                </a:prstGeom>
-                <a:noFill/>
-              </p:spPr>
-              <p:txBody>
-                <a:bodyPr wrap="none" rtlCol="0">
-                  <a:spAutoFit/>
-                </a:bodyPr>
-                <a:lstStyle/>
-                <a:p>
-                  <a:pPr/>
-                  <a14:m>
-                    <m:oMathPara xmlns:m="http://schemas.openxmlformats.org/officeDocument/2006/math">
-                      <m:oMathParaPr>
-                        <m:jc m:val="centerGroup"/>
-                      </m:oMathParaPr>
-                      <m:oMath xmlns:m="http://schemas.openxmlformats.org/officeDocument/2006/math">
-                        <m:sSub>
-                          <m:sSubPr>
-                            <m:ctrlPr>
-                              <a:rPr lang="de-DE" sz="2200" b="0" i="1" smtClean="0">
-                                <a:latin typeface="Cambria Math" panose="02040503050406030204" pitchFamily="18" charset="0"/>
-                              </a:rPr>
-                            </m:ctrlPr>
-                          </m:sSubPr>
-                          <m:e>
-                            <m:r>
-                              <a:rPr lang="de-DE" sz="2200" b="0" i="1" smtClean="0">
-                                <a:latin typeface="Cambria Math" panose="02040503050406030204" pitchFamily="18" charset="0"/>
-                              </a:rPr>
-                              <m:t>𝑥</m:t>
-                            </m:r>
-                          </m:e>
-                          <m:sub>
-                            <m:r>
-                              <a:rPr lang="de-DE" sz="2200" b="0" i="1" smtClean="0">
-                                <a:latin typeface="Cambria Math" panose="02040503050406030204" pitchFamily="18" charset="0"/>
-                              </a:rPr>
-                              <m:t>1</m:t>
-                            </m:r>
-                          </m:sub>
-                        </m:sSub>
-                      </m:oMath>
-                    </m:oMathPara>
-                  </a14:m>
-                  <a:endParaRPr lang="en-US" sz="2200" dirty="0"/>
-                </a:p>
-              </p:txBody>
-            </p:sp>
-          </mc:Choice>
-          <mc:Fallback>
-            <p:sp>
-              <p:nvSpPr>
-                <p:cNvPr id="198" name="Textfeld 197">
-                  <a:extLst>
-                    <a:ext uri="{FF2B5EF4-FFF2-40B4-BE49-F238E27FC236}">
-                      <a16:creationId xmlns:a16="http://schemas.microsoft.com/office/drawing/2014/main" id="{AF7BE3C3-DE73-1844-C868-A05C931C8973}"/>
-                    </a:ext>
-                  </a:extLst>
-                </p:cNvPr>
-                <p:cNvSpPr txBox="1">
-                  <a:spLocks noRot="1" noChangeAspect="1" noMove="1" noResize="1" noEditPoints="1" noAdjustHandles="1" noChangeArrowheads="1" noChangeShapeType="1" noTextEdit="1"/>
-                </p:cNvSpPr>
-                <p:nvPr/>
-              </p:nvSpPr>
-              <p:spPr>
-                <a:xfrm>
-                  <a:off x="9700026" y="1308446"/>
-                  <a:ext cx="520527" cy="430887"/>
-                </a:xfrm>
-                <a:prstGeom prst="rect">
-                  <a:avLst/>
-                </a:prstGeom>
-                <a:blipFill>
-                  <a:blip r:embed="rId6"/>
-                  <a:stretch>
-                    <a:fillRect/>
-                  </a:stretch>
-                </a:blipFill>
-              </p:spPr>
-              <p:txBody>
-                <a:bodyPr/>
-                <a:lstStyle/>
-                <a:p>
-                  <a:r>
-                    <a:rPr lang="en-US">
-                      <a:noFill/>
-                    </a:rPr>
-                    <a:t> </a:t>
-                  </a:r>
-                </a:p>
-              </p:txBody>
-            </p:sp>
-          </mc:Fallback>
-        </mc:AlternateContent>
-        <mc:AlternateContent xmlns:mc="http://schemas.openxmlformats.org/markup-compatibility/2006">
-          <mc:Choice xmlns:a14="http://schemas.microsoft.com/office/drawing/2010/main" Requires="a14">
-            <p:sp>
-              <p:nvSpPr>
-                <p:cNvPr id="199" name="Textfeld 198">
-                  <a:extLst>
-                    <a:ext uri="{FF2B5EF4-FFF2-40B4-BE49-F238E27FC236}">
-                      <a16:creationId xmlns:a16="http://schemas.microsoft.com/office/drawing/2014/main" id="{9A650995-9BDD-027F-1307-CEC548D6ECFB}"/>
-                    </a:ext>
-                  </a:extLst>
-                </p:cNvPr>
-                <p:cNvSpPr txBox="1"/>
-                <p:nvPr/>
-              </p:nvSpPr>
-              <p:spPr>
-                <a:xfrm>
-                  <a:off x="9696756" y="2048294"/>
-                  <a:ext cx="527067" cy="430887"/>
-                </a:xfrm>
-                <a:prstGeom prst="rect">
-                  <a:avLst/>
-                </a:prstGeom>
-                <a:noFill/>
-              </p:spPr>
-              <p:txBody>
-                <a:bodyPr wrap="none" rtlCol="0">
-                  <a:spAutoFit/>
-                </a:bodyPr>
-                <a:lstStyle/>
-                <a:p>
-                  <a:pPr/>
-                  <a14:m>
-                    <m:oMathPara xmlns:m="http://schemas.openxmlformats.org/officeDocument/2006/math">
-                      <m:oMathParaPr>
-                        <m:jc m:val="centerGroup"/>
-                      </m:oMathParaPr>
-                      <m:oMath xmlns:m="http://schemas.openxmlformats.org/officeDocument/2006/math">
-                        <m:sSub>
-                          <m:sSubPr>
-                            <m:ctrlPr>
-                              <a:rPr lang="de-DE" sz="2200" b="0" i="1" smtClean="0">
-                                <a:latin typeface="Cambria Math" panose="02040503050406030204" pitchFamily="18" charset="0"/>
-                              </a:rPr>
-                            </m:ctrlPr>
-                          </m:sSubPr>
-                          <m:e>
-                            <m:r>
-                              <a:rPr lang="de-DE" sz="2200" b="0" i="1" smtClean="0">
-                                <a:latin typeface="Cambria Math" panose="02040503050406030204" pitchFamily="18" charset="0"/>
-                              </a:rPr>
-                              <m:t>𝑥</m:t>
-                            </m:r>
-                          </m:e>
-                          <m:sub>
-                            <m:r>
-                              <a:rPr lang="de-DE" sz="2200" b="0" i="1" smtClean="0">
-                                <a:latin typeface="Cambria Math" panose="02040503050406030204" pitchFamily="18" charset="0"/>
-                              </a:rPr>
-                              <m:t>2</m:t>
-                            </m:r>
-                          </m:sub>
-                        </m:sSub>
-                      </m:oMath>
-                    </m:oMathPara>
-                  </a14:m>
-                  <a:endParaRPr lang="en-US" sz="2200" dirty="0"/>
-                </a:p>
-              </p:txBody>
-            </p:sp>
-          </mc:Choice>
-          <mc:Fallback>
-            <p:sp>
-              <p:nvSpPr>
-                <p:cNvPr id="199" name="Textfeld 198">
-                  <a:extLst>
-                    <a:ext uri="{FF2B5EF4-FFF2-40B4-BE49-F238E27FC236}">
-                      <a16:creationId xmlns:a16="http://schemas.microsoft.com/office/drawing/2014/main" id="{9A650995-9BDD-027F-1307-CEC548D6ECFB}"/>
-                    </a:ext>
-                  </a:extLst>
-                </p:cNvPr>
-                <p:cNvSpPr txBox="1">
-                  <a:spLocks noRot="1" noChangeAspect="1" noMove="1" noResize="1" noEditPoints="1" noAdjustHandles="1" noChangeArrowheads="1" noChangeShapeType="1" noTextEdit="1"/>
-                </p:cNvSpPr>
-                <p:nvPr/>
-              </p:nvSpPr>
-              <p:spPr>
-                <a:xfrm>
-                  <a:off x="9696756" y="2048294"/>
-                  <a:ext cx="527067" cy="430887"/>
-                </a:xfrm>
-                <a:prstGeom prst="rect">
-                  <a:avLst/>
-                </a:prstGeom>
-                <a:blipFill>
-                  <a:blip r:embed="rId7"/>
-                  <a:stretch>
-                    <a:fillRect/>
-                  </a:stretch>
-                </a:blipFill>
-              </p:spPr>
-              <p:txBody>
-                <a:bodyPr/>
-                <a:lstStyle/>
-                <a:p>
-                  <a:r>
-                    <a:rPr lang="en-US">
-                      <a:noFill/>
-                    </a:rPr>
-                    <a:t> </a:t>
-                  </a:r>
-                </a:p>
-              </p:txBody>
-            </p:sp>
-          </mc:Fallback>
-        </mc:AlternateContent>
-        <mc:AlternateContent xmlns:mc="http://schemas.openxmlformats.org/markup-compatibility/2006">
-          <mc:Choice xmlns:a14="http://schemas.microsoft.com/office/drawing/2010/main" Requires="a14">
-            <p:sp>
-              <p:nvSpPr>
-                <p:cNvPr id="200" name="Textfeld 199">
-                  <a:extLst>
-                    <a:ext uri="{FF2B5EF4-FFF2-40B4-BE49-F238E27FC236}">
-                      <a16:creationId xmlns:a16="http://schemas.microsoft.com/office/drawing/2014/main" id="{369405A8-DA9B-4E8E-88DC-42DF14724F9E}"/>
-                    </a:ext>
-                  </a:extLst>
-                </p:cNvPr>
-                <p:cNvSpPr txBox="1"/>
-                <p:nvPr/>
-              </p:nvSpPr>
-              <p:spPr>
-                <a:xfrm>
-                  <a:off x="9696756" y="2819383"/>
-                  <a:ext cx="527067" cy="430887"/>
-                </a:xfrm>
-                <a:prstGeom prst="rect">
-                  <a:avLst/>
-                </a:prstGeom>
-                <a:noFill/>
-              </p:spPr>
-              <p:txBody>
-                <a:bodyPr wrap="none" rtlCol="0">
-                  <a:spAutoFit/>
-                </a:bodyPr>
-                <a:lstStyle/>
-                <a:p>
-                  <a:pPr/>
-                  <a14:m>
-                    <m:oMathPara xmlns:m="http://schemas.openxmlformats.org/officeDocument/2006/math">
-                      <m:oMathParaPr>
-                        <m:jc m:val="centerGroup"/>
-                      </m:oMathParaPr>
-                      <m:oMath xmlns:m="http://schemas.openxmlformats.org/officeDocument/2006/math">
-                        <m:sSub>
-                          <m:sSubPr>
-                            <m:ctrlPr>
-                              <a:rPr lang="de-DE" sz="2200" b="0" i="1" smtClean="0">
-                                <a:latin typeface="Cambria Math" panose="02040503050406030204" pitchFamily="18" charset="0"/>
-                              </a:rPr>
-                            </m:ctrlPr>
-                          </m:sSubPr>
-                          <m:e>
-                            <m:r>
-                              <a:rPr lang="de-DE" sz="2200" b="0" i="1" smtClean="0">
-                                <a:latin typeface="Cambria Math" panose="02040503050406030204" pitchFamily="18" charset="0"/>
-                              </a:rPr>
-                              <m:t>𝑥</m:t>
-                            </m:r>
-                          </m:e>
-                          <m:sub>
-                            <m:r>
-                              <a:rPr lang="de-DE" sz="2200" b="0" i="1" smtClean="0">
-                                <a:latin typeface="Cambria Math" panose="02040503050406030204" pitchFamily="18" charset="0"/>
-                              </a:rPr>
-                              <m:t>3</m:t>
-                            </m:r>
-                          </m:sub>
-                        </m:sSub>
-                      </m:oMath>
-                    </m:oMathPara>
-                  </a14:m>
-                  <a:endParaRPr lang="en-US" sz="2200" dirty="0"/>
-                </a:p>
-              </p:txBody>
-            </p:sp>
-          </mc:Choice>
-          <mc:Fallback>
-            <p:sp>
-              <p:nvSpPr>
-                <p:cNvPr id="200" name="Textfeld 199">
-                  <a:extLst>
-                    <a:ext uri="{FF2B5EF4-FFF2-40B4-BE49-F238E27FC236}">
-                      <a16:creationId xmlns:a16="http://schemas.microsoft.com/office/drawing/2014/main" id="{369405A8-DA9B-4E8E-88DC-42DF14724F9E}"/>
-                    </a:ext>
-                  </a:extLst>
-                </p:cNvPr>
-                <p:cNvSpPr txBox="1">
-                  <a:spLocks noRot="1" noChangeAspect="1" noMove="1" noResize="1" noEditPoints="1" noAdjustHandles="1" noChangeArrowheads="1" noChangeShapeType="1" noTextEdit="1"/>
-                </p:cNvSpPr>
-                <p:nvPr/>
-              </p:nvSpPr>
-              <p:spPr>
-                <a:xfrm>
-                  <a:off x="9696756" y="2819383"/>
-                  <a:ext cx="527067" cy="430887"/>
-                </a:xfrm>
-                <a:prstGeom prst="rect">
-                  <a:avLst/>
-                </a:prstGeom>
-                <a:blipFill>
-                  <a:blip r:embed="rId8"/>
-                  <a:stretch>
-                    <a:fillRect/>
-                  </a:stretch>
-                </a:blipFill>
-              </p:spPr>
-              <p:txBody>
-                <a:bodyPr/>
-                <a:lstStyle/>
-                <a:p>
-                  <a:r>
-                    <a:rPr lang="en-US">
-                      <a:noFill/>
-                    </a:rPr>
-                    <a:t> </a:t>
-                  </a:r>
-                </a:p>
-              </p:txBody>
-            </p:sp>
-          </mc:Fallback>
-        </mc:AlternateContent>
         <p:sp>
           <p:nvSpPr>
-            <p:cNvPr id="201" name="Textfeld 200">
+            <p:cNvPr id="203" name="Ellipse 202">
               <a:extLst>
                 <a:ext uri="{FF2B5EF4-FFF2-40B4-BE49-F238E27FC236}">
-                  <a16:creationId xmlns:a16="http://schemas.microsoft.com/office/drawing/2014/main" id="{EF068201-85AA-6219-4A95-BC86C92CDCAF}"/>
+                  <a16:creationId xmlns:a16="http://schemas.microsoft.com/office/drawing/2014/main" id="{0BE3A713-41A3-67CE-95A7-A5DBA0F78908}"/>
                 </a:ext>
               </a:extLst>
             </p:cNvPr>
-            <p:cNvSpPr txBox="1"/>
+            <p:cNvSpPr>
+              <a:spLocks noChangeAspect="1"/>
+            </p:cNvSpPr>
             <p:nvPr/>
           </p:nvSpPr>
           <p:spPr>
             <a:xfrm>
-              <a:off x="9696756" y="3781681"/>
-              <a:ext cx="2674217" cy="400110"/>
+              <a:off x="11601028" y="3841346"/>
+              <a:ext cx="143228" cy="144000"/>
             </a:xfrm>
-            <a:prstGeom prst="rect">
+            <a:prstGeom prst="ellipse">
               <a:avLst/>
             </a:prstGeom>
-            <a:noFill/>
+            <a:solidFill>
+              <a:schemeClr val="tx1"/>
+            </a:solidFill>
+            <a:ln>
+              <a:noFill/>
+            </a:ln>
           </p:spPr>
+          <p:style>
+            <a:lnRef idx="2">
+              <a:schemeClr val="accent1">
+                <a:shade val="15000"/>
+              </a:schemeClr>
+            </a:lnRef>
+            <a:fillRef idx="1">
+              <a:schemeClr val="accent1"/>
+            </a:fillRef>
+            <a:effectRef idx="0">
+              <a:schemeClr val="accent1"/>
+            </a:effectRef>
+            <a:fontRef idx="minor">
+              <a:schemeClr val="lt1"/>
+            </a:fontRef>
+          </p:style>
           <p:txBody>
-            <a:bodyPr wrap="square" rtlCol="0">
-              <a:spAutoFit/>
-            </a:bodyPr>
+            <a:bodyPr rtlCol="0" anchor="ctr"/>
             <a:lstStyle/>
             <a:p>
-              <a:r>
-                <a:rPr lang="en-US" sz="2000" dirty="0"/>
-                <a:t>Effect on alpha diversity </a:t>
-              </a:r>
+              <a:pPr algn="ctr"/>
+              <a:endParaRPr lang="en-US"/>
             </a:p>
           </p:txBody>
         </p:sp>
       </p:grpSp>
+      <mc:AlternateContent xmlns:mc="http://schemas.openxmlformats.org/markup-compatibility/2006">
+        <mc:Choice xmlns:a14="http://schemas.microsoft.com/office/drawing/2010/main" Requires="a14">
+          <p:sp>
+            <p:nvSpPr>
+              <p:cNvPr id="198" name="Textfeld 197">
+                <a:extLst>
+                  <a:ext uri="{FF2B5EF4-FFF2-40B4-BE49-F238E27FC236}">
+                    <a16:creationId xmlns:a16="http://schemas.microsoft.com/office/drawing/2014/main" id="{AF7BE3C3-DE73-1844-C868-A05C931C8973}"/>
+                  </a:ext>
+                </a:extLst>
+              </p:cNvPr>
+              <p:cNvSpPr txBox="1"/>
+              <p:nvPr/>
+            </p:nvSpPr>
+            <p:spPr>
+              <a:xfrm>
+                <a:off x="9694047" y="1308446"/>
+                <a:ext cx="520527" cy="430887"/>
+              </a:xfrm>
+              <a:prstGeom prst="rect">
+                <a:avLst/>
+              </a:prstGeom>
+              <a:noFill/>
+            </p:spPr>
+            <p:txBody>
+              <a:bodyPr wrap="none" rtlCol="0">
+                <a:spAutoFit/>
+              </a:bodyPr>
+              <a:lstStyle/>
+              <a:p>
+                <a:pPr/>
+                <a14:m>
+                  <m:oMathPara xmlns:m="http://schemas.openxmlformats.org/officeDocument/2006/math">
+                    <m:oMathParaPr>
+                      <m:jc m:val="centerGroup"/>
+                    </m:oMathParaPr>
+                    <m:oMath xmlns:m="http://schemas.openxmlformats.org/officeDocument/2006/math">
+                      <m:sSub>
+                        <m:sSubPr>
+                          <m:ctrlPr>
+                            <a:rPr lang="de-DE" sz="2200" b="0" i="1" smtClean="0">
+                              <a:latin typeface="Cambria Math" panose="02040503050406030204" pitchFamily="18" charset="0"/>
+                            </a:rPr>
+                          </m:ctrlPr>
+                        </m:sSubPr>
+                        <m:e>
+                          <m:r>
+                            <a:rPr lang="de-DE" sz="2200" b="0" i="1" smtClean="0">
+                              <a:latin typeface="Cambria Math" panose="02040503050406030204" pitchFamily="18" charset="0"/>
+                            </a:rPr>
+                            <m:t>𝑥</m:t>
+                          </m:r>
+                        </m:e>
+                        <m:sub>
+                          <m:r>
+                            <a:rPr lang="de-DE" sz="2200" b="0" i="1" smtClean="0">
+                              <a:latin typeface="Cambria Math" panose="02040503050406030204" pitchFamily="18" charset="0"/>
+                            </a:rPr>
+                            <m:t>1</m:t>
+                          </m:r>
+                        </m:sub>
+                      </m:sSub>
+                    </m:oMath>
+                  </m:oMathPara>
+                </a14:m>
+                <a:endParaRPr lang="en-US" sz="2200" dirty="0"/>
+              </a:p>
+            </p:txBody>
+          </p:sp>
+        </mc:Choice>
+        <mc:Fallback>
+          <p:sp>
+            <p:nvSpPr>
+              <p:cNvPr id="198" name="Textfeld 197">
+                <a:extLst>
+                  <a:ext uri="{FF2B5EF4-FFF2-40B4-BE49-F238E27FC236}">
+                    <a16:creationId xmlns:a16="http://schemas.microsoft.com/office/drawing/2014/main" id="{AF7BE3C3-DE73-1844-C868-A05C931C8973}"/>
+                  </a:ext>
+                </a:extLst>
+              </p:cNvPr>
+              <p:cNvSpPr txBox="1">
+                <a:spLocks noRot="1" noChangeAspect="1" noMove="1" noResize="1" noEditPoints="1" noAdjustHandles="1" noChangeArrowheads="1" noChangeShapeType="1" noTextEdit="1"/>
+              </p:cNvSpPr>
+              <p:nvPr/>
+            </p:nvSpPr>
+            <p:spPr>
+              <a:xfrm>
+                <a:off x="9694047" y="1308446"/>
+                <a:ext cx="520527" cy="430887"/>
+              </a:xfrm>
+              <a:prstGeom prst="rect">
+                <a:avLst/>
+              </a:prstGeom>
+              <a:blipFill>
+                <a:blip r:embed="rId6"/>
+                <a:stretch>
+                  <a:fillRect/>
+                </a:stretch>
+              </a:blipFill>
+            </p:spPr>
+            <p:txBody>
+              <a:bodyPr/>
+              <a:lstStyle/>
+              <a:p>
+                <a:r>
+                  <a:rPr lang="en-US">
+                    <a:noFill/>
+                  </a:rPr>
+                  <a:t> </a:t>
+                </a:r>
+              </a:p>
+            </p:txBody>
+          </p:sp>
+        </mc:Fallback>
+      </mc:AlternateContent>
+      <mc:AlternateContent xmlns:mc="http://schemas.openxmlformats.org/markup-compatibility/2006">
+        <mc:Choice xmlns:a14="http://schemas.microsoft.com/office/drawing/2010/main" Requires="a14">
+          <p:sp>
+            <p:nvSpPr>
+              <p:cNvPr id="199" name="Textfeld 198">
+                <a:extLst>
+                  <a:ext uri="{FF2B5EF4-FFF2-40B4-BE49-F238E27FC236}">
+                    <a16:creationId xmlns:a16="http://schemas.microsoft.com/office/drawing/2014/main" id="{9A650995-9BDD-027F-1307-CEC548D6ECFB}"/>
+                  </a:ext>
+                </a:extLst>
+              </p:cNvPr>
+              <p:cNvSpPr txBox="1"/>
+              <p:nvPr/>
+            </p:nvSpPr>
+            <p:spPr>
+              <a:xfrm>
+                <a:off x="9690777" y="2048294"/>
+                <a:ext cx="527067" cy="430887"/>
+              </a:xfrm>
+              <a:prstGeom prst="rect">
+                <a:avLst/>
+              </a:prstGeom>
+              <a:noFill/>
+            </p:spPr>
+            <p:txBody>
+              <a:bodyPr wrap="none" rtlCol="0">
+                <a:spAutoFit/>
+              </a:bodyPr>
+              <a:lstStyle/>
+              <a:p>
+                <a:pPr/>
+                <a14:m>
+                  <m:oMathPara xmlns:m="http://schemas.openxmlformats.org/officeDocument/2006/math">
+                    <m:oMathParaPr>
+                      <m:jc m:val="centerGroup"/>
+                    </m:oMathParaPr>
+                    <m:oMath xmlns:m="http://schemas.openxmlformats.org/officeDocument/2006/math">
+                      <m:sSub>
+                        <m:sSubPr>
+                          <m:ctrlPr>
+                            <a:rPr lang="de-DE" sz="2200" b="0" i="1" smtClean="0">
+                              <a:latin typeface="Cambria Math" panose="02040503050406030204" pitchFamily="18" charset="0"/>
+                            </a:rPr>
+                          </m:ctrlPr>
+                        </m:sSubPr>
+                        <m:e>
+                          <m:r>
+                            <a:rPr lang="de-DE" sz="2200" b="0" i="1" smtClean="0">
+                              <a:latin typeface="Cambria Math" panose="02040503050406030204" pitchFamily="18" charset="0"/>
+                            </a:rPr>
+                            <m:t>𝑥</m:t>
+                          </m:r>
+                        </m:e>
+                        <m:sub>
+                          <m:r>
+                            <a:rPr lang="de-DE" sz="2200" b="0" i="1" smtClean="0">
+                              <a:latin typeface="Cambria Math" panose="02040503050406030204" pitchFamily="18" charset="0"/>
+                            </a:rPr>
+                            <m:t>2</m:t>
+                          </m:r>
+                        </m:sub>
+                      </m:sSub>
+                    </m:oMath>
+                  </m:oMathPara>
+                </a14:m>
+                <a:endParaRPr lang="en-US" sz="2200" dirty="0"/>
+              </a:p>
+            </p:txBody>
+          </p:sp>
+        </mc:Choice>
+        <mc:Fallback>
+          <p:sp>
+            <p:nvSpPr>
+              <p:cNvPr id="199" name="Textfeld 198">
+                <a:extLst>
+                  <a:ext uri="{FF2B5EF4-FFF2-40B4-BE49-F238E27FC236}">
+                    <a16:creationId xmlns:a16="http://schemas.microsoft.com/office/drawing/2014/main" id="{9A650995-9BDD-027F-1307-CEC548D6ECFB}"/>
+                  </a:ext>
+                </a:extLst>
+              </p:cNvPr>
+              <p:cNvSpPr txBox="1">
+                <a:spLocks noRot="1" noChangeAspect="1" noMove="1" noResize="1" noEditPoints="1" noAdjustHandles="1" noChangeArrowheads="1" noChangeShapeType="1" noTextEdit="1"/>
+              </p:cNvSpPr>
+              <p:nvPr/>
+            </p:nvSpPr>
+            <p:spPr>
+              <a:xfrm>
+                <a:off x="9690777" y="2048294"/>
+                <a:ext cx="527067" cy="430887"/>
+              </a:xfrm>
+              <a:prstGeom prst="rect">
+                <a:avLst/>
+              </a:prstGeom>
+              <a:blipFill>
+                <a:blip r:embed="rId7"/>
+                <a:stretch>
+                  <a:fillRect/>
+                </a:stretch>
+              </a:blipFill>
+            </p:spPr>
+            <p:txBody>
+              <a:bodyPr/>
+              <a:lstStyle/>
+              <a:p>
+                <a:r>
+                  <a:rPr lang="en-US">
+                    <a:noFill/>
+                  </a:rPr>
+                  <a:t> </a:t>
+                </a:r>
+              </a:p>
+            </p:txBody>
+          </p:sp>
+        </mc:Fallback>
+      </mc:AlternateContent>
+      <mc:AlternateContent xmlns:mc="http://schemas.openxmlformats.org/markup-compatibility/2006">
+        <mc:Choice xmlns:a14="http://schemas.microsoft.com/office/drawing/2010/main" Requires="a14">
+          <p:sp>
+            <p:nvSpPr>
+              <p:cNvPr id="200" name="Textfeld 199">
+                <a:extLst>
+                  <a:ext uri="{FF2B5EF4-FFF2-40B4-BE49-F238E27FC236}">
+                    <a16:creationId xmlns:a16="http://schemas.microsoft.com/office/drawing/2014/main" id="{369405A8-DA9B-4E8E-88DC-42DF14724F9E}"/>
+                  </a:ext>
+                </a:extLst>
+              </p:cNvPr>
+              <p:cNvSpPr txBox="1"/>
+              <p:nvPr/>
+            </p:nvSpPr>
+            <p:spPr>
+              <a:xfrm>
+                <a:off x="9690777" y="2819383"/>
+                <a:ext cx="527067" cy="430887"/>
+              </a:xfrm>
+              <a:prstGeom prst="rect">
+                <a:avLst/>
+              </a:prstGeom>
+              <a:noFill/>
+            </p:spPr>
+            <p:txBody>
+              <a:bodyPr wrap="none" rtlCol="0">
+                <a:spAutoFit/>
+              </a:bodyPr>
+              <a:lstStyle/>
+              <a:p>
+                <a:pPr/>
+                <a14:m>
+                  <m:oMathPara xmlns:m="http://schemas.openxmlformats.org/officeDocument/2006/math">
+                    <m:oMathParaPr>
+                      <m:jc m:val="centerGroup"/>
+                    </m:oMathParaPr>
+                    <m:oMath xmlns:m="http://schemas.openxmlformats.org/officeDocument/2006/math">
+                      <m:sSub>
+                        <m:sSubPr>
+                          <m:ctrlPr>
+                            <a:rPr lang="de-DE" sz="2200" b="0" i="1" smtClean="0">
+                              <a:latin typeface="Cambria Math" panose="02040503050406030204" pitchFamily="18" charset="0"/>
+                            </a:rPr>
+                          </m:ctrlPr>
+                        </m:sSubPr>
+                        <m:e>
+                          <m:r>
+                            <a:rPr lang="de-DE" sz="2200" b="0" i="1" smtClean="0">
+                              <a:latin typeface="Cambria Math" panose="02040503050406030204" pitchFamily="18" charset="0"/>
+                            </a:rPr>
+                            <m:t>𝑥</m:t>
+                          </m:r>
+                        </m:e>
+                        <m:sub>
+                          <m:r>
+                            <a:rPr lang="de-DE" sz="2200" b="0" i="1" smtClean="0">
+                              <a:latin typeface="Cambria Math" panose="02040503050406030204" pitchFamily="18" charset="0"/>
+                            </a:rPr>
+                            <m:t>3</m:t>
+                          </m:r>
+                        </m:sub>
+                      </m:sSub>
+                    </m:oMath>
+                  </m:oMathPara>
+                </a14:m>
+                <a:endParaRPr lang="en-US" sz="2200" dirty="0"/>
+              </a:p>
+            </p:txBody>
+          </p:sp>
+        </mc:Choice>
+        <mc:Fallback>
+          <p:sp>
+            <p:nvSpPr>
+              <p:cNvPr id="200" name="Textfeld 199">
+                <a:extLst>
+                  <a:ext uri="{FF2B5EF4-FFF2-40B4-BE49-F238E27FC236}">
+                    <a16:creationId xmlns:a16="http://schemas.microsoft.com/office/drawing/2014/main" id="{369405A8-DA9B-4E8E-88DC-42DF14724F9E}"/>
+                  </a:ext>
+                </a:extLst>
+              </p:cNvPr>
+              <p:cNvSpPr txBox="1">
+                <a:spLocks noRot="1" noChangeAspect="1" noMove="1" noResize="1" noEditPoints="1" noAdjustHandles="1" noChangeArrowheads="1" noChangeShapeType="1" noTextEdit="1"/>
+              </p:cNvSpPr>
+              <p:nvPr/>
+            </p:nvSpPr>
+            <p:spPr>
+              <a:xfrm>
+                <a:off x="9690777" y="2819383"/>
+                <a:ext cx="527067" cy="430887"/>
+              </a:xfrm>
+              <a:prstGeom prst="rect">
+                <a:avLst/>
+              </a:prstGeom>
+              <a:blipFill>
+                <a:blip r:embed="rId8"/>
+                <a:stretch>
+                  <a:fillRect/>
+                </a:stretch>
+              </a:blipFill>
+            </p:spPr>
+            <p:txBody>
+              <a:bodyPr/>
+              <a:lstStyle/>
+              <a:p>
+                <a:r>
+                  <a:rPr lang="en-US">
+                    <a:noFill/>
+                  </a:rPr>
+                  <a:t> </a:t>
+                </a:r>
+              </a:p>
+            </p:txBody>
+          </p:sp>
+        </mc:Fallback>
+      </mc:AlternateContent>
+      <p:sp>
+        <p:nvSpPr>
+          <p:cNvPr id="201" name="Textfeld 200">
+            <a:extLst>
+              <a:ext uri="{FF2B5EF4-FFF2-40B4-BE49-F238E27FC236}">
+                <a16:creationId xmlns:a16="http://schemas.microsoft.com/office/drawing/2014/main" id="{EF068201-85AA-6219-4A95-BC86C92CDCAF}"/>
+              </a:ext>
+            </a:extLst>
+          </p:cNvPr>
+          <p:cNvSpPr txBox="1"/>
+          <p:nvPr/>
+        </p:nvSpPr>
+        <p:spPr>
+          <a:xfrm>
+            <a:off x="9798356" y="3781681"/>
+            <a:ext cx="2674217" cy="400110"/>
+          </a:xfrm>
+          <a:prstGeom prst="rect">
+            <a:avLst/>
+          </a:prstGeom>
+          <a:noFill/>
+        </p:spPr>
+        <p:txBody>
+          <a:bodyPr wrap="square" rtlCol="0">
+            <a:spAutoFit/>
+          </a:bodyPr>
+          <a:lstStyle/>
+          <a:p>
+            <a:r>
+              <a:rPr lang="en-US" sz="2000" dirty="0"/>
+              <a:t>Effect on alpha diversity </a:t>
+            </a:r>
+          </a:p>
+        </p:txBody>
+      </p:sp>
       <mc:AlternateContent xmlns:mc="http://schemas.openxmlformats.org/markup-compatibility/2006">
         <mc:Choice xmlns:a14="http://schemas.microsoft.com/office/drawing/2010/main" Requires="a14">
           <p:sp>
@@ -22644,8 +22405,8 @@
             </p:nvSpPr>
             <p:spPr>
               <a:xfrm>
-                <a:off x="10355343" y="5320946"/>
-                <a:ext cx="1691682" cy="830997"/>
+                <a:off x="10241055" y="5023766"/>
+                <a:ext cx="1751245" cy="830997"/>
               </a:xfrm>
               <a:prstGeom prst="rect">
                 <a:avLst/>
@@ -22653,7 +22414,7 @@
               <a:noFill/>
             </p:spPr>
             <p:txBody>
-              <a:bodyPr wrap="none" rtlCol="0">
+              <a:bodyPr wrap="square" rtlCol="0">
                 <a:spAutoFit/>
               </a:bodyPr>
               <a:lstStyle/>
@@ -22827,8 +22588,8 @@
             </p:nvSpPr>
             <p:spPr>
               <a:xfrm>
-                <a:off x="10355343" y="5320946"/>
-                <a:ext cx="1691682" cy="830997"/>
+                <a:off x="10241055" y="5023766"/>
+                <a:ext cx="1751245" cy="830997"/>
               </a:xfrm>
               <a:prstGeom prst="rect">
                 <a:avLst/>
@@ -22857,62 +22618,6 @@
       </mc:AlternateContent>
       <p:sp>
         <p:nvSpPr>
-          <p:cNvPr id="218" name="Rechteck: abgerundete Ecken 217">
-            <a:extLst>
-              <a:ext uri="{FF2B5EF4-FFF2-40B4-BE49-F238E27FC236}">
-                <a16:creationId xmlns:a16="http://schemas.microsoft.com/office/drawing/2014/main" id="{71E61FE5-024B-F2D2-BC1B-E124B3B1C213}"/>
-              </a:ext>
-            </a:extLst>
-          </p:cNvPr>
-          <p:cNvSpPr/>
-          <p:nvPr/>
-        </p:nvSpPr>
-        <p:spPr>
-          <a:xfrm>
-            <a:off x="9847517" y="802475"/>
-            <a:ext cx="2639623" cy="3637789"/>
-          </a:xfrm>
-          <a:prstGeom prst="roundRect">
-            <a:avLst>
-              <a:gd name="adj" fmla="val 5312"/>
-            </a:avLst>
-          </a:prstGeom>
-          <a:noFill/>
-          <a:ln>
-            <a:solidFill>
-              <a:schemeClr val="bg1">
-                <a:lumMod val="75000"/>
-              </a:schemeClr>
-            </a:solidFill>
-          </a:ln>
-        </p:spPr>
-        <p:style>
-          <a:lnRef idx="2">
-            <a:schemeClr val="accent1">
-              <a:shade val="15000"/>
-            </a:schemeClr>
-          </a:lnRef>
-          <a:fillRef idx="1">
-            <a:schemeClr val="accent1"/>
-          </a:fillRef>
-          <a:effectRef idx="0">
-            <a:schemeClr val="accent1"/>
-          </a:effectRef>
-          <a:fontRef idx="minor">
-            <a:schemeClr val="lt1"/>
-          </a:fontRef>
-        </p:style>
-        <p:txBody>
-          <a:bodyPr rtlCol="0" anchor="ctr"/>
-          <a:lstStyle/>
-          <a:p>
-            <a:pPr algn="ctr"/>
-            <a:endParaRPr lang="en-US"/>
-          </a:p>
-        </p:txBody>
-      </p:sp>
-      <p:sp>
-        <p:nvSpPr>
           <p:cNvPr id="219" name="Textfeld 218">
             <a:extLst>
               <a:ext uri="{FF2B5EF4-FFF2-40B4-BE49-F238E27FC236}">
@@ -22925,8 +22630,8 @@
         </p:nvSpPr>
         <p:spPr>
           <a:xfrm>
-            <a:off x="9700035" y="4799762"/>
-            <a:ext cx="2934586" cy="430887"/>
+            <a:off x="10241055" y="4502582"/>
+            <a:ext cx="1795896" cy="461665"/>
           </a:xfrm>
           <a:prstGeom prst="rect">
             <a:avLst/>
@@ -22941,65 +22646,9 @@
           <a:p>
             <a:pPr algn="ctr"/>
             <a:r>
-              <a:rPr lang="en-US" sz="2200" b="1" dirty="0"/>
-              <a:t>Hypothesis testing</a:t>
+              <a:rPr lang="en-US" sz="2400" b="1" dirty="0"/>
+              <a:t>Hypotheses:</a:t>
             </a:r>
-          </a:p>
-        </p:txBody>
-      </p:sp>
-      <p:sp>
-        <p:nvSpPr>
-          <p:cNvPr id="220" name="Rechteck: abgerundete Ecken 219">
-            <a:extLst>
-              <a:ext uri="{FF2B5EF4-FFF2-40B4-BE49-F238E27FC236}">
-                <a16:creationId xmlns:a16="http://schemas.microsoft.com/office/drawing/2014/main" id="{6FC2CFD6-E759-FBB2-0358-0F5988E70D53}"/>
-              </a:ext>
-            </a:extLst>
-          </p:cNvPr>
-          <p:cNvSpPr/>
-          <p:nvPr/>
-        </p:nvSpPr>
-        <p:spPr>
-          <a:xfrm>
-            <a:off x="9849152" y="5251529"/>
-            <a:ext cx="2636352" cy="1007629"/>
-          </a:xfrm>
-          <a:prstGeom prst="roundRect">
-            <a:avLst>
-              <a:gd name="adj" fmla="val 12233"/>
-            </a:avLst>
-          </a:prstGeom>
-          <a:noFill/>
-          <a:ln>
-            <a:solidFill>
-              <a:schemeClr val="bg1">
-                <a:lumMod val="75000"/>
-              </a:schemeClr>
-            </a:solidFill>
-          </a:ln>
-        </p:spPr>
-        <p:style>
-          <a:lnRef idx="2">
-            <a:schemeClr val="accent1">
-              <a:shade val="15000"/>
-            </a:schemeClr>
-          </a:lnRef>
-          <a:fillRef idx="1">
-            <a:schemeClr val="accent1"/>
-          </a:fillRef>
-          <a:effectRef idx="0">
-            <a:schemeClr val="accent1"/>
-          </a:effectRef>
-          <a:fontRef idx="minor">
-            <a:schemeClr val="lt1"/>
-          </a:fontRef>
-        </p:style>
-        <p:txBody>
-          <a:bodyPr rtlCol="0" anchor="ctr"/>
-          <a:lstStyle/>
-          <a:p>
-            <a:pPr algn="ctr"/>
-            <a:endParaRPr lang="en-US"/>
           </a:p>
         </p:txBody>
       </p:sp>
@@ -23046,6 +22695,399 @@
           </a:p>
         </p:txBody>
       </p:sp>
+      <p:grpSp>
+        <p:nvGrpSpPr>
+          <p:cNvPr id="2" name="Gruppieren 1">
+            <a:extLst>
+              <a:ext uri="{FF2B5EF4-FFF2-40B4-BE49-F238E27FC236}">
+                <a16:creationId xmlns:a16="http://schemas.microsoft.com/office/drawing/2014/main" id="{9404AF7C-7906-3042-CE2B-61292EF85668}"/>
+              </a:ext>
+            </a:extLst>
+          </p:cNvPr>
+          <p:cNvGrpSpPr/>
+          <p:nvPr/>
+        </p:nvGrpSpPr>
+        <p:grpSpPr>
+          <a:xfrm>
+            <a:off x="11159171" y="1469346"/>
+            <a:ext cx="679606" cy="144000"/>
+            <a:chOff x="11137108" y="2719483"/>
+            <a:chExt cx="679606" cy="144000"/>
+          </a:xfrm>
+        </p:grpSpPr>
+        <p:grpSp>
+          <p:nvGrpSpPr>
+            <p:cNvPr id="3" name="Gruppieren 2">
+              <a:extLst>
+                <a:ext uri="{FF2B5EF4-FFF2-40B4-BE49-F238E27FC236}">
+                  <a16:creationId xmlns:a16="http://schemas.microsoft.com/office/drawing/2014/main" id="{83783FBF-EF1A-92D6-A839-7EA574A3F3B9}"/>
+                </a:ext>
+              </a:extLst>
+            </p:cNvPr>
+            <p:cNvGrpSpPr/>
+            <p:nvPr/>
+          </p:nvGrpSpPr>
+          <p:grpSpPr>
+            <a:xfrm>
+              <a:off x="11137108" y="2747423"/>
+              <a:ext cx="679606" cy="100739"/>
+              <a:chOff x="10861959" y="2769054"/>
+              <a:chExt cx="1229904" cy="100739"/>
+            </a:xfrm>
+          </p:grpSpPr>
+          <p:cxnSp>
+            <p:nvCxnSpPr>
+              <p:cNvPr id="5" name="Gerader Verbinder 4">
+                <a:extLst>
+                  <a:ext uri="{FF2B5EF4-FFF2-40B4-BE49-F238E27FC236}">
+                    <a16:creationId xmlns:a16="http://schemas.microsoft.com/office/drawing/2014/main" id="{562DCE8F-1A8B-7EC6-3030-BCA7042A87D6}"/>
+                  </a:ext>
+                </a:extLst>
+              </p:cNvPr>
+              <p:cNvCxnSpPr>
+                <a:cxnSpLocks/>
+              </p:cNvCxnSpPr>
+              <p:nvPr/>
+            </p:nvCxnSpPr>
+            <p:spPr>
+              <a:xfrm>
+                <a:off x="10864486" y="2819424"/>
+                <a:ext cx="1227377" cy="0"/>
+              </a:xfrm>
+              <a:prstGeom prst="line">
+                <a:avLst/>
+              </a:prstGeom>
+              <a:ln w="31750">
+                <a:solidFill>
+                  <a:schemeClr val="tx1"/>
+                </a:solidFill>
+              </a:ln>
+            </p:spPr>
+            <p:style>
+              <a:lnRef idx="1">
+                <a:schemeClr val="accent1"/>
+              </a:lnRef>
+              <a:fillRef idx="0">
+                <a:schemeClr val="accent1"/>
+              </a:fillRef>
+              <a:effectRef idx="0">
+                <a:schemeClr val="accent1"/>
+              </a:effectRef>
+              <a:fontRef idx="minor">
+                <a:schemeClr val="tx1"/>
+              </a:fontRef>
+            </p:style>
+          </p:cxnSp>
+          <p:cxnSp>
+            <p:nvCxnSpPr>
+              <p:cNvPr id="6" name="Gerader Verbinder 5">
+                <a:extLst>
+                  <a:ext uri="{FF2B5EF4-FFF2-40B4-BE49-F238E27FC236}">
+                    <a16:creationId xmlns:a16="http://schemas.microsoft.com/office/drawing/2014/main" id="{481542EC-714B-8D41-AEC3-D89F380404A1}"/>
+                  </a:ext>
+                </a:extLst>
+              </p:cNvPr>
+              <p:cNvCxnSpPr/>
+              <p:nvPr/>
+            </p:nvCxnSpPr>
+            <p:spPr>
+              <a:xfrm>
+                <a:off x="10861959" y="2769054"/>
+                <a:ext cx="0" cy="100739"/>
+              </a:xfrm>
+              <a:prstGeom prst="line">
+                <a:avLst/>
+              </a:prstGeom>
+              <a:ln w="31750">
+                <a:solidFill>
+                  <a:schemeClr val="tx1"/>
+                </a:solidFill>
+              </a:ln>
+            </p:spPr>
+            <p:style>
+              <a:lnRef idx="1">
+                <a:schemeClr val="accent1"/>
+              </a:lnRef>
+              <a:fillRef idx="0">
+                <a:schemeClr val="accent1"/>
+              </a:fillRef>
+              <a:effectRef idx="0">
+                <a:schemeClr val="accent1"/>
+              </a:effectRef>
+              <a:fontRef idx="minor">
+                <a:schemeClr val="tx1"/>
+              </a:fontRef>
+            </p:style>
+          </p:cxnSp>
+          <p:cxnSp>
+            <p:nvCxnSpPr>
+              <p:cNvPr id="7" name="Gerader Verbinder 6">
+                <a:extLst>
+                  <a:ext uri="{FF2B5EF4-FFF2-40B4-BE49-F238E27FC236}">
+                    <a16:creationId xmlns:a16="http://schemas.microsoft.com/office/drawing/2014/main" id="{4AC4E5F3-AAD6-1AAD-D671-76A29D901D79}"/>
+                  </a:ext>
+                </a:extLst>
+              </p:cNvPr>
+              <p:cNvCxnSpPr/>
+              <p:nvPr/>
+            </p:nvCxnSpPr>
+            <p:spPr>
+              <a:xfrm>
+                <a:off x="12091863" y="2769054"/>
+                <a:ext cx="0" cy="100739"/>
+              </a:xfrm>
+              <a:prstGeom prst="line">
+                <a:avLst/>
+              </a:prstGeom>
+              <a:ln w="31750">
+                <a:solidFill>
+                  <a:schemeClr val="tx1"/>
+                </a:solidFill>
+              </a:ln>
+            </p:spPr>
+            <p:style>
+              <a:lnRef idx="1">
+                <a:schemeClr val="accent1"/>
+              </a:lnRef>
+              <a:fillRef idx="0">
+                <a:schemeClr val="accent1"/>
+              </a:fillRef>
+              <a:effectRef idx="0">
+                <a:schemeClr val="accent1"/>
+              </a:effectRef>
+              <a:fontRef idx="minor">
+                <a:schemeClr val="tx1"/>
+              </a:fontRef>
+            </p:style>
+          </p:cxnSp>
+        </p:grpSp>
+        <p:sp>
+          <p:nvSpPr>
+            <p:cNvPr id="4" name="Ellipse 3">
+              <a:extLst>
+                <a:ext uri="{FF2B5EF4-FFF2-40B4-BE49-F238E27FC236}">
+                  <a16:creationId xmlns:a16="http://schemas.microsoft.com/office/drawing/2014/main" id="{FE444ED0-792A-C05A-148F-8EC58358FF70}"/>
+                </a:ext>
+              </a:extLst>
+            </p:cNvPr>
+            <p:cNvSpPr>
+              <a:spLocks noChangeAspect="1"/>
+            </p:cNvSpPr>
+            <p:nvPr/>
+          </p:nvSpPr>
+          <p:spPr>
+            <a:xfrm>
+              <a:off x="11406560" y="2719483"/>
+              <a:ext cx="143228" cy="144000"/>
+            </a:xfrm>
+            <a:prstGeom prst="ellipse">
+              <a:avLst/>
+            </a:prstGeom>
+            <a:solidFill>
+              <a:schemeClr val="tx1"/>
+            </a:solidFill>
+            <a:ln>
+              <a:noFill/>
+            </a:ln>
+          </p:spPr>
+          <p:style>
+            <a:lnRef idx="2">
+              <a:schemeClr val="accent1">
+                <a:shade val="15000"/>
+              </a:schemeClr>
+            </a:lnRef>
+            <a:fillRef idx="1">
+              <a:schemeClr val="accent1"/>
+            </a:fillRef>
+            <a:effectRef idx="0">
+              <a:schemeClr val="accent1"/>
+            </a:effectRef>
+            <a:fontRef idx="minor">
+              <a:schemeClr val="lt1"/>
+            </a:fontRef>
+          </p:style>
+          <p:txBody>
+            <a:bodyPr rtlCol="0" anchor="ctr"/>
+            <a:lstStyle/>
+            <a:p>
+              <a:pPr algn="ctr"/>
+              <a:endParaRPr lang="en-US"/>
+            </a:p>
+          </p:txBody>
+        </p:sp>
+      </p:grpSp>
+      <p:cxnSp>
+        <p:nvCxnSpPr>
+          <p:cNvPr id="9" name="Gerader Verbinder 8">
+            <a:extLst>
+              <a:ext uri="{FF2B5EF4-FFF2-40B4-BE49-F238E27FC236}">
+                <a16:creationId xmlns:a16="http://schemas.microsoft.com/office/drawing/2014/main" id="{AB20448F-83A1-5AEA-52E8-0A5108AD5E02}"/>
+              </a:ext>
+            </a:extLst>
+          </p:cNvPr>
+          <p:cNvCxnSpPr>
+            <a:cxnSpLocks/>
+          </p:cNvCxnSpPr>
+          <p:nvPr/>
+        </p:nvCxnSpPr>
+        <p:spPr>
+          <a:xfrm>
+            <a:off x="10174780" y="1060948"/>
+            <a:ext cx="0" cy="2316321"/>
+          </a:xfrm>
+          <a:prstGeom prst="line">
+            <a:avLst/>
+          </a:prstGeom>
+          <a:ln w="25400">
+            <a:solidFill>
+              <a:schemeClr val="tx1"/>
+            </a:solidFill>
+          </a:ln>
+        </p:spPr>
+        <p:style>
+          <a:lnRef idx="1">
+            <a:schemeClr val="accent1"/>
+          </a:lnRef>
+          <a:fillRef idx="0">
+            <a:schemeClr val="accent1"/>
+          </a:fillRef>
+          <a:effectRef idx="0">
+            <a:schemeClr val="accent1"/>
+          </a:effectRef>
+          <a:fontRef idx="minor">
+            <a:schemeClr val="tx1"/>
+          </a:fontRef>
+        </p:style>
+      </p:cxnSp>
+      <p:cxnSp>
+        <p:nvCxnSpPr>
+          <p:cNvPr id="11" name="Gerader Verbinder 10">
+            <a:extLst>
+              <a:ext uri="{FF2B5EF4-FFF2-40B4-BE49-F238E27FC236}">
+                <a16:creationId xmlns:a16="http://schemas.microsoft.com/office/drawing/2014/main" id="{3D4DC084-9EE1-423E-05E9-288C27EB2A6A}"/>
+              </a:ext>
+            </a:extLst>
+          </p:cNvPr>
+          <p:cNvCxnSpPr>
+            <a:cxnSpLocks/>
+          </p:cNvCxnSpPr>
+          <p:nvPr/>
+        </p:nvCxnSpPr>
+        <p:spPr>
+          <a:xfrm flipH="1">
+            <a:off x="10077059" y="3064737"/>
+            <a:ext cx="97721" cy="0"/>
+          </a:xfrm>
+          <a:prstGeom prst="line">
+            <a:avLst/>
+          </a:prstGeom>
+          <a:ln w="25400">
+            <a:solidFill>
+              <a:schemeClr val="tx1"/>
+            </a:solidFill>
+          </a:ln>
+        </p:spPr>
+        <p:style>
+          <a:lnRef idx="1">
+            <a:schemeClr val="accent1"/>
+          </a:lnRef>
+          <a:fillRef idx="0">
+            <a:schemeClr val="accent1"/>
+          </a:fillRef>
+          <a:effectRef idx="0">
+            <a:schemeClr val="accent1"/>
+          </a:effectRef>
+          <a:fontRef idx="minor">
+            <a:schemeClr val="tx1"/>
+          </a:fontRef>
+        </p:style>
+      </p:cxnSp>
+      <p:cxnSp>
+        <p:nvCxnSpPr>
+          <p:cNvPr id="13" name="Gerader Verbinder 12">
+            <a:extLst>
+              <a:ext uri="{FF2B5EF4-FFF2-40B4-BE49-F238E27FC236}">
+                <a16:creationId xmlns:a16="http://schemas.microsoft.com/office/drawing/2014/main" id="{A26A67BC-4F8E-7356-681B-D1DFD7740C2A}"/>
+              </a:ext>
+            </a:extLst>
+          </p:cNvPr>
+          <p:cNvCxnSpPr>
+            <a:cxnSpLocks/>
+          </p:cNvCxnSpPr>
+          <p:nvPr/>
+        </p:nvCxnSpPr>
+        <p:spPr>
+          <a:xfrm flipH="1">
+            <a:off x="10077059" y="2277932"/>
+            <a:ext cx="97721" cy="0"/>
+          </a:xfrm>
+          <a:prstGeom prst="line">
+            <a:avLst/>
+          </a:prstGeom>
+          <a:ln w="25400">
+            <a:solidFill>
+              <a:schemeClr val="tx1"/>
+            </a:solidFill>
+          </a:ln>
+        </p:spPr>
+        <p:style>
+          <a:lnRef idx="1">
+            <a:schemeClr val="accent1"/>
+          </a:lnRef>
+          <a:fillRef idx="0">
+            <a:schemeClr val="accent1"/>
+          </a:fillRef>
+          <a:effectRef idx="0">
+            <a:schemeClr val="accent1"/>
+          </a:effectRef>
+          <a:fontRef idx="minor">
+            <a:schemeClr val="tx1"/>
+          </a:fontRef>
+        </p:style>
+      </p:cxnSp>
+      <p:cxnSp>
+        <p:nvCxnSpPr>
+          <p:cNvPr id="14" name="Gerader Verbinder 13">
+            <a:extLst>
+              <a:ext uri="{FF2B5EF4-FFF2-40B4-BE49-F238E27FC236}">
+                <a16:creationId xmlns:a16="http://schemas.microsoft.com/office/drawing/2014/main" id="{C956F0D9-85B5-12A8-E13A-B1463B652FF6}"/>
+              </a:ext>
+            </a:extLst>
+          </p:cNvPr>
+          <p:cNvCxnSpPr>
+            <a:cxnSpLocks/>
+          </p:cNvCxnSpPr>
+          <p:nvPr/>
+        </p:nvCxnSpPr>
+        <p:spPr>
+          <a:xfrm flipH="1">
+            <a:off x="10077059" y="1547656"/>
+            <a:ext cx="97721" cy="0"/>
+          </a:xfrm>
+          <a:prstGeom prst="line">
+            <a:avLst/>
+          </a:prstGeom>
+          <a:ln w="25400">
+            <a:solidFill>
+              <a:schemeClr val="tx1"/>
+            </a:solidFill>
+          </a:ln>
+        </p:spPr>
+        <p:style>
+          <a:lnRef idx="1">
+            <a:schemeClr val="accent1"/>
+          </a:lnRef>
+          <a:fillRef idx="0">
+            <a:schemeClr val="accent1"/>
+          </a:fillRef>
+          <a:effectRef idx="0">
+            <a:schemeClr val="accent1"/>
+          </a:effectRef>
+          <a:fontRef idx="minor">
+            <a:schemeClr val="tx1"/>
+          </a:fontRef>
+        </p:style>
+      </p:cxnSp>
     </p:spTree>
     <p:extLst>
       <p:ext uri="{BB962C8B-B14F-4D97-AF65-F5344CB8AC3E}">
